--- a/cours/Module TIC/Série Officielle 01-10/Cours_TIC_09_Reseaux_Informatiques_FR.pptx
+++ b/cours/Module TIC/Série Officielle 01-10/Cours_TIC_09_Reseaux_Informatiques_FR.pptx
@@ -2856,7 +2856,7 @@
           <a:solidFill>
             <a:schemeClr val="tx1"/>
           </a:solidFill>
-          <a:latin typeface="+mj-lt"/>
+          <a:latin typeface="Poppins"/>
           <a:ea typeface="+mj-ea"/>
           <a:cs typeface="+mj-cs"/>
         </a:defRPr>
@@ -2873,7 +2873,7 @@
           <a:solidFill>
             <a:schemeClr val="tx1"/>
           </a:solidFill>
-          <a:latin typeface="+mn-lt"/>
+          <a:latin typeface="Poppins"/>
           <a:ea typeface="+mn-ea"/>
           <a:cs typeface="+mn-cs"/>
         </a:defRPr>
@@ -2888,7 +2888,7 @@
           <a:solidFill>
             <a:schemeClr val="tx1"/>
           </a:solidFill>
-          <a:latin typeface="+mn-lt"/>
+          <a:latin typeface="Poppins"/>
           <a:ea typeface="+mn-ea"/>
           <a:cs typeface="+mn-cs"/>
         </a:defRPr>
@@ -2903,7 +2903,7 @@
           <a:solidFill>
             <a:schemeClr val="tx1"/>
           </a:solidFill>
-          <a:latin typeface="+mn-lt"/>
+          <a:latin typeface="Poppins"/>
           <a:ea typeface="+mn-ea"/>
           <a:cs typeface="+mn-cs"/>
         </a:defRPr>
@@ -2918,7 +2918,7 @@
           <a:solidFill>
             <a:schemeClr val="tx1"/>
           </a:solidFill>
-          <a:latin typeface="+mn-lt"/>
+          <a:latin typeface="Poppins"/>
           <a:ea typeface="+mn-ea"/>
           <a:cs typeface="+mn-cs"/>
         </a:defRPr>
@@ -2933,7 +2933,7 @@
           <a:solidFill>
             <a:schemeClr val="tx1"/>
           </a:solidFill>
-          <a:latin typeface="+mn-lt"/>
+          <a:latin typeface="Poppins"/>
           <a:ea typeface="+mn-ea"/>
           <a:cs typeface="+mn-cs"/>
         </a:defRPr>
@@ -2948,7 +2948,7 @@
           <a:solidFill>
             <a:schemeClr val="tx1"/>
           </a:solidFill>
-          <a:latin typeface="+mn-lt"/>
+          <a:latin typeface="Poppins"/>
           <a:ea typeface="+mn-ea"/>
           <a:cs typeface="+mn-cs"/>
         </a:defRPr>
@@ -2963,7 +2963,7 @@
           <a:solidFill>
             <a:schemeClr val="tx1"/>
           </a:solidFill>
-          <a:latin typeface="+mn-lt"/>
+          <a:latin typeface="Poppins"/>
           <a:ea typeface="+mn-ea"/>
           <a:cs typeface="+mn-cs"/>
         </a:defRPr>
@@ -2978,7 +2978,7 @@
           <a:solidFill>
             <a:schemeClr val="tx1"/>
           </a:solidFill>
-          <a:latin typeface="+mn-lt"/>
+          <a:latin typeface="Poppins"/>
           <a:ea typeface="+mn-ea"/>
           <a:cs typeface="+mn-cs"/>
         </a:defRPr>
@@ -2993,7 +2993,7 @@
           <a:solidFill>
             <a:schemeClr val="tx1"/>
           </a:solidFill>
-          <a:latin typeface="+mn-lt"/>
+          <a:latin typeface="Poppins"/>
           <a:ea typeface="+mn-ea"/>
           <a:cs typeface="+mn-cs"/>
         </a:defRPr>
@@ -3008,7 +3008,7 @@
           <a:solidFill>
             <a:schemeClr val="tx1"/>
           </a:solidFill>
-          <a:latin typeface="+mn-lt"/>
+          <a:latin typeface="Poppins"/>
           <a:ea typeface="+mn-ea"/>
           <a:cs typeface="+mn-cs"/>
         </a:defRPr>
@@ -3018,7 +3018,7 @@
           <a:solidFill>
             <a:schemeClr val="tx1"/>
           </a:solidFill>
-          <a:latin typeface="+mn-lt"/>
+          <a:latin typeface="Poppins"/>
           <a:ea typeface="+mn-ea"/>
           <a:cs typeface="+mn-cs"/>
         </a:defRPr>
@@ -3028,7 +3028,7 @@
           <a:solidFill>
             <a:schemeClr val="tx1"/>
           </a:solidFill>
-          <a:latin typeface="+mn-lt"/>
+          <a:latin typeface="Poppins"/>
           <a:ea typeface="+mn-ea"/>
           <a:cs typeface="+mn-cs"/>
         </a:defRPr>
@@ -3038,7 +3038,7 @@
           <a:solidFill>
             <a:schemeClr val="tx1"/>
           </a:solidFill>
-          <a:latin typeface="+mn-lt"/>
+          <a:latin typeface="Poppins"/>
           <a:ea typeface="+mn-ea"/>
           <a:cs typeface="+mn-cs"/>
         </a:defRPr>
@@ -3048,7 +3048,7 @@
           <a:solidFill>
             <a:schemeClr val="tx1"/>
           </a:solidFill>
-          <a:latin typeface="+mn-lt"/>
+          <a:latin typeface="Poppins"/>
           <a:ea typeface="+mn-ea"/>
           <a:cs typeface="+mn-cs"/>
         </a:defRPr>
@@ -3058,7 +3058,7 @@
           <a:solidFill>
             <a:schemeClr val="tx1"/>
           </a:solidFill>
-          <a:latin typeface="+mn-lt"/>
+          <a:latin typeface="Poppins"/>
           <a:ea typeface="+mn-ea"/>
           <a:cs typeface="+mn-cs"/>
         </a:defRPr>
@@ -3068,7 +3068,7 @@
           <a:solidFill>
             <a:schemeClr val="tx1"/>
           </a:solidFill>
-          <a:latin typeface="+mn-lt"/>
+          <a:latin typeface="Poppins"/>
           <a:ea typeface="+mn-ea"/>
           <a:cs typeface="+mn-cs"/>
         </a:defRPr>
@@ -3078,7 +3078,7 @@
           <a:solidFill>
             <a:schemeClr val="tx1"/>
           </a:solidFill>
-          <a:latin typeface="+mn-lt"/>
+          <a:latin typeface="Poppins"/>
           <a:ea typeface="+mn-ea"/>
           <a:cs typeface="+mn-cs"/>
         </a:defRPr>
@@ -3088,7 +3088,7 @@
           <a:solidFill>
             <a:schemeClr val="tx1"/>
           </a:solidFill>
-          <a:latin typeface="+mn-lt"/>
+          <a:latin typeface="Poppins"/>
           <a:ea typeface="+mn-ea"/>
           <a:cs typeface="+mn-cs"/>
         </a:defRPr>
@@ -3103,9 +3103,7 @@
   <p:cSld>
     <p:bg>
       <p:bgPr>
-        <a:solidFill>
-          <a:srgbClr val="0B3D2E"/>
-        </a:solidFill>
+        <a:solidFill>val="004A38"/&gt;</a:solidFill>
         <a:effectLst/>
       </p:bgPr>
     </p:bg>
@@ -3130,9 +3128,7 @@
           <a:prstGeom prst="rect">
             <a:avLst/>
           </a:prstGeom>
-          <a:solidFill>
-            <a:srgbClr val="146B4A"/>
-          </a:solidFill>
+          <a:solidFill>val="007A55"/&gt;</a:solidFill>
           <a:ln>
             <a:noFill/>
           </a:ln>
@@ -3174,9 +3170,7 @@
           <a:prstGeom prst="rect">
             <a:avLst/>
           </a:prstGeom>
-          <a:solidFill>
-            <a:srgbClr val="FFD700"/>
-          </a:solidFill>
+          <a:solidFill>val="F0B429"/&gt;</a:solidFill>
           <a:ln>
             <a:noFill/>
           </a:ln>
@@ -3218,9 +3212,7 @@
           <a:prstGeom prst="rect">
             <a:avLst/>
           </a:prstGeom>
-          <a:solidFill>
-            <a:srgbClr val="FFD700"/>
-          </a:solidFill>
+          <a:solidFill>val="F0B429"/&gt;</a:solidFill>
           <a:ln>
             <a:noFill/>
           </a:ln>
@@ -3262,9 +3254,7 @@
           <a:prstGeom prst="rect">
             <a:avLst/>
           </a:prstGeom>
-          <a:solidFill>
-            <a:srgbClr val="146B4A"/>
-          </a:solidFill>
+          <a:solidFill>val="007A55"/&gt;</a:solidFill>
           <a:ln>
             <a:noFill/>
           </a:ln>
@@ -3306,9 +3296,7 @@
           <a:prstGeom prst="rect">
             <a:avLst/>
           </a:prstGeom>
-          <a:solidFill>
-            <a:srgbClr val="FFD700"/>
-          </a:solidFill>
+          <a:solidFill>val="F0B429"/&gt;</a:solidFill>
           <a:ln>
             <a:noFill/>
           </a:ln>
@@ -3361,10 +3349,8 @@
             <a:pPr algn="ctr"/>
             <a:r>
               <a:rPr sz="4000" b="1" i="0">
-                <a:solidFill>
-                  <a:srgbClr val="FFD700"/>
-                </a:solidFill>
-                <a:latin typeface="Calibri"/>
+                <a:solidFill>val="F0B429"/&gt;</a:solidFill>
+                <a:latin typeface="Poppins"/>
               </a:rPr>
               <a:t>COURS TIC 09</a:t>
             </a:r>
@@ -3396,10 +3382,8 @@
             <a:pPr algn="ctr"/>
             <a:r>
               <a:rPr sz="3000" b="1" i="0">
-                <a:solidFill>
-                  <a:srgbClr val="FFFFFF"/>
-                </a:solidFill>
-                <a:latin typeface="Calibri"/>
+                <a:solidFill>val="FFFFFF"/&gt;</a:solidFill>
+                <a:latin typeface="Poppins"/>
               </a:rPr>
               <a:t>Réseaux Informatiques</a:t>
             </a:r>
@@ -3420,9 +3404,7 @@
           <a:prstGeom prst="rect">
             <a:avLst/>
           </a:prstGeom>
-          <a:solidFill>
-            <a:srgbClr val="146B4A"/>
-          </a:solidFill>
+          <a:solidFill>val="007A55"/&gt;</a:solidFill>
           <a:ln>
             <a:noFill/>
           </a:ln>
@@ -3475,10 +3457,8 @@
             <a:pPr algn="ctr"/>
             <a:r>
               <a:rPr sz="1800" b="0" i="0">
-                <a:solidFill>
-                  <a:srgbClr val="BBBBBB"/>
-                </a:solidFill>
-                <a:latin typeface="Calibri"/>
+                <a:solidFill>val="9AA7B6"/&gt;</a:solidFill>
+                <a:latin typeface="Poppins"/>
               </a:rPr>
               <a:t>Dr. BELACEL Madani</a:t>
             </a:r>
@@ -3510,10 +3490,8 @@
             <a:pPr algn="ctr"/>
             <a:r>
               <a:rPr sz="1400" b="0" i="1">
-                <a:solidFill>
-                  <a:srgbClr val="BBBBBB"/>
-                </a:solidFill>
-                <a:latin typeface="Calibri"/>
+                <a:solidFill>val="9AA7B6"/&gt;</a:solidFill>
+                <a:latin typeface="Poppins"/>
               </a:rPr>
               <a:t>Année universitaire 2026-2027 / Academic Year 2026-2027</a:t>
             </a:r>
@@ -3545,10 +3523,8 @@
             <a:pPr algn="ctr"/>
             <a:r>
               <a:rPr sz="1200" b="0" i="1">
-                <a:solidFill>
-                  <a:srgbClr val="BBBBBB"/>
-                </a:solidFill>
-                <a:latin typeface="Calibri"/>
+                <a:solidFill>val="9AA7B6"/&gt;</a:solidFill>
+                <a:latin typeface="Poppins"/>
               </a:rPr>
               <a:t>Université de Mostaganem - Département Mathématiques et Informatique</a:t>
             </a:r>
@@ -3579,6 +3555,47 @@
           </a:prstGeom>
         </p:spPr>
       </p:pic>
+      <p:sp>
+        <p:nvSpPr>
+          <p:cNvPr id="990001" name="Pied de page FLE"/>
+          <p:cNvSpPr>
+            <a:spLocks noGrp="1"/>
+          </p:cNvSpPr>
+          <p:nvPr/>
+        </p:nvSpPr>
+        <p:spPr>
+          <a:xfrm>
+            <a:off x="4343400" y="-329184"/>
+            <a:ext cx="4572000" cy="274320"/>
+          </a:xfrm>
+          <a:prstGeom prst="rect">
+            <a:avLst/>
+          </a:prstGeom>
+        </p:spPr>
+        <p:txBody>
+          <a:bodyPr anchor="b"/>
+          <a:lstStyle/>
+          <a:p>
+            <a:pPr algn="r">
+              <a:defRPr sz="900">
+                <a:solidFill>
+                  <a:srgbClr val="9AA7B6"/>
+                </a:solidFill>
+                <a:latin typeface="Poppins"/>
+              </a:defRPr>
+            </a:pPr>
+            <a:r>
+              <a:rPr lang="fr-FR" sz="900">
+                <a:solidFill>
+                  <a:srgbClr val="9AA7B6"/>
+                </a:solidFill>
+                <a:latin typeface="Poppins"/>
+              </a:rPr>
+              <a:t>Université de Mostaganem — Dr. Madani BELACEL</a:t>
+            </a:r>
+          </a:p>
+        </p:txBody>
+      </p:sp>
     </p:spTree>
   </p:cSld>
   <p:clrMapOvr>
@@ -3592,9 +3609,7 @@
   <p:cSld>
     <p:bg>
       <p:bgPr>
-        <a:solidFill>
-          <a:srgbClr val="0B3D2E"/>
-        </a:solidFill>
+        <a:solidFill>val="004A38"/&gt;</a:solidFill>
         <a:effectLst/>
       </p:bgPr>
     </p:bg>
@@ -3619,9 +3634,7 @@
           <a:prstGeom prst="rect">
             <a:avLst/>
           </a:prstGeom>
-          <a:solidFill>
-            <a:srgbClr val="146B4A"/>
-          </a:solidFill>
+          <a:solidFill>val="007A55"/&gt;</a:solidFill>
           <a:ln>
             <a:noFill/>
           </a:ln>
@@ -3663,9 +3676,7 @@
           <a:prstGeom prst="rect">
             <a:avLst/>
           </a:prstGeom>
-          <a:solidFill>
-            <a:srgbClr val="FFD700"/>
-          </a:solidFill>
+          <a:solidFill>val="F0B429"/&gt;</a:solidFill>
           <a:ln>
             <a:noFill/>
           </a:ln>
@@ -3707,9 +3718,7 @@
           <a:prstGeom prst="rect">
             <a:avLst/>
           </a:prstGeom>
-          <a:solidFill>
-            <a:srgbClr val="FFD700"/>
-          </a:solidFill>
+          <a:solidFill>val="F0B429"/&gt;</a:solidFill>
           <a:ln>
             <a:noFill/>
           </a:ln>
@@ -3751,9 +3760,7 @@
           <a:prstGeom prst="rect">
             <a:avLst/>
           </a:prstGeom>
-          <a:solidFill>
-            <a:srgbClr val="146B4A"/>
-          </a:solidFill>
+          <a:solidFill>val="007A55"/&gt;</a:solidFill>
           <a:ln>
             <a:noFill/>
           </a:ln>
@@ -3806,10 +3813,8 @@
             <a:pPr algn="l"/>
             <a:r>
               <a:rPr sz="2400" b="1" i="0">
-                <a:solidFill>
-                  <a:srgbClr val="FFD700"/>
-                </a:solidFill>
-                <a:latin typeface="Calibri"/>
+                <a:solidFill>val="F0B429"/&gt;</a:solidFill>
+                <a:latin typeface="Poppins"/>
               </a:rPr>
               <a:t>4 - Le modèle OSI et TCP/IP</a:t>
             </a:r>
@@ -3830,9 +3835,7 @@
           <a:prstGeom prst="rect">
             <a:avLst/>
           </a:prstGeom>
-          <a:solidFill>
-            <a:srgbClr val="146B4A"/>
-          </a:solidFill>
+          <a:solidFill>val="007A55"/&gt;</a:solidFill>
           <a:ln>
             <a:noFill/>
           </a:ln>
@@ -3889,10 +3892,8 @@
             </a:pPr>
             <a:r>
               <a:rPr sz="1800">
-                <a:solidFill>
-                  <a:srgbClr val="FFFFFF"/>
-                </a:solidFill>
-                <a:latin typeface="Calibri"/>
+                <a:solidFill>val="FFFFFF"/&gt;</a:solidFill>
+                <a:latin typeface="Poppins"/>
               </a:rPr>
               <a:t>▪  OSI : 7 couches, du câble physique à l'application.</a:t>
             </a:r>
@@ -3905,10 +3906,8 @@
             </a:pPr>
             <a:r>
               <a:rPr sz="1800">
-                <a:solidFill>
-                  <a:srgbClr val="FFFFFF"/>
-                </a:solidFill>
-                <a:latin typeface="Calibri"/>
+                <a:solidFill>val="FFFFFF"/&gt;</a:solidFill>
+                <a:latin typeface="Poppins"/>
               </a:rPr>
               <a:t>▪  TCP/IP : 4 couches, modèle réel d'Internet.</a:t>
             </a:r>
@@ -3921,10 +3920,8 @@
             </a:pPr>
             <a:r>
               <a:rPr sz="1800">
-                <a:solidFill>
-                  <a:srgbClr val="FFFFFF"/>
-                </a:solidFill>
-                <a:latin typeface="Calibri"/>
+                <a:solidFill>val="FFFFFF"/&gt;</a:solidFill>
+                <a:latin typeface="Poppins"/>
               </a:rPr>
               <a:t>▪  Couche physique, liaison, réseau (IP), transport (TCP/UDP).</a:t>
             </a:r>
@@ -3937,10 +3934,8 @@
             </a:pPr>
             <a:r>
               <a:rPr sz="1800">
-                <a:solidFill>
-                  <a:srgbClr val="FFFFFF"/>
-                </a:solidFill>
-                <a:latin typeface="Calibri"/>
+                <a:solidFill>val="FFFFFF"/&gt;</a:solidFill>
+                <a:latin typeface="Poppins"/>
               </a:rPr>
               <a:t>▪  Chaque couche apporte un service à la couche supérieure.</a:t>
             </a:r>
@@ -3971,6 +3966,47 @@
           </a:prstGeom>
         </p:spPr>
       </p:pic>
+      <p:sp>
+        <p:nvSpPr>
+          <p:cNvPr id="990001" name="Pied de page FLE"/>
+          <p:cNvSpPr>
+            <a:spLocks noGrp="1"/>
+          </p:cNvSpPr>
+          <p:nvPr/>
+        </p:nvSpPr>
+        <p:spPr>
+          <a:xfrm>
+            <a:off x="4343400" y="-329184"/>
+            <a:ext cx="4572000" cy="274320"/>
+          </a:xfrm>
+          <a:prstGeom prst="rect">
+            <a:avLst/>
+          </a:prstGeom>
+        </p:spPr>
+        <p:txBody>
+          <a:bodyPr anchor="b"/>
+          <a:lstStyle/>
+          <a:p>
+            <a:pPr algn="r">
+              <a:defRPr sz="900">
+                <a:solidFill>
+                  <a:srgbClr val="9AA7B6"/>
+                </a:solidFill>
+                <a:latin typeface="Poppins"/>
+              </a:defRPr>
+            </a:pPr>
+            <a:r>
+              <a:rPr lang="fr-FR" sz="900">
+                <a:solidFill>
+                  <a:srgbClr val="9AA7B6"/>
+                </a:solidFill>
+                <a:latin typeface="Poppins"/>
+              </a:rPr>
+              <a:t>Université de Mostaganem — Dr. Madani BELACEL</a:t>
+            </a:r>
+          </a:p>
+        </p:txBody>
+      </p:sp>
     </p:spTree>
   </p:cSld>
   <p:clrMapOvr>
@@ -3984,9 +4020,7 @@
   <p:cSld>
     <p:bg>
       <p:bgPr>
-        <a:solidFill>
-          <a:srgbClr val="0B3D2E"/>
-        </a:solidFill>
+        <a:solidFill>val="004A38"/&gt;</a:solidFill>
         <a:effectLst/>
       </p:bgPr>
     </p:bg>
@@ -4011,9 +4045,7 @@
           <a:prstGeom prst="rect">
             <a:avLst/>
           </a:prstGeom>
-          <a:solidFill>
-            <a:srgbClr val="146B4A"/>
-          </a:solidFill>
+          <a:solidFill>val="007A55"/&gt;</a:solidFill>
           <a:ln>
             <a:noFill/>
           </a:ln>
@@ -4055,9 +4087,7 @@
           <a:prstGeom prst="rect">
             <a:avLst/>
           </a:prstGeom>
-          <a:solidFill>
-            <a:srgbClr val="FFD700"/>
-          </a:solidFill>
+          <a:solidFill>val="F0B429"/&gt;</a:solidFill>
           <a:ln>
             <a:noFill/>
           </a:ln>
@@ -4099,9 +4129,7 @@
           <a:prstGeom prst="rect">
             <a:avLst/>
           </a:prstGeom>
-          <a:solidFill>
-            <a:srgbClr val="FFD700"/>
-          </a:solidFill>
+          <a:solidFill>val="F0B429"/&gt;</a:solidFill>
           <a:ln>
             <a:noFill/>
           </a:ln>
@@ -4143,9 +4171,7 @@
           <a:prstGeom prst="rect">
             <a:avLst/>
           </a:prstGeom>
-          <a:solidFill>
-            <a:srgbClr val="146B4A"/>
-          </a:solidFill>
+          <a:solidFill>val="007A55"/&gt;</a:solidFill>
           <a:ln>
             <a:noFill/>
           </a:ln>
@@ -4187,9 +4213,7 @@
           <a:prstGeom prst="rect">
             <a:avLst/>
           </a:prstGeom>
-          <a:solidFill>
-            <a:srgbClr val="146B4A"/>
-          </a:solidFill>
+          <a:solidFill>val="007A55"/&gt;</a:solidFill>
           <a:ln>
             <a:noFill/>
           </a:ln>
@@ -4242,10 +4266,8 @@
             <a:pPr algn="ctr"/>
             <a:r>
               <a:rPr sz="2200" b="1" i="0">
-                <a:solidFill>
-                  <a:srgbClr val="BBBBBB"/>
-                </a:solidFill>
-                <a:latin typeface="Calibri"/>
+                <a:solidFill>val="9AA7B6"/&gt;</a:solidFill>
+                <a:latin typeface="Poppins"/>
               </a:rPr>
               <a:t>Section 5</a:t>
             </a:r>
@@ -4277,10 +4299,8 @@
             <a:pPr algn="ctr"/>
             <a:r>
               <a:rPr sz="2800" b="1" i="0">
-                <a:solidFill>
-                  <a:srgbClr val="FFD700"/>
-                </a:solidFill>
-                <a:latin typeface="Calibri"/>
+                <a:solidFill>val="F0B429"/&gt;</a:solidFill>
+                <a:latin typeface="Poppins"/>
               </a:rPr>
               <a:t>Adressage IP</a:t>
             </a:r>
@@ -4311,6 +4331,47 @@
           </a:prstGeom>
         </p:spPr>
       </p:pic>
+      <p:sp>
+        <p:nvSpPr>
+          <p:cNvPr id="990001" name="Pied de page FLE"/>
+          <p:cNvSpPr>
+            <a:spLocks noGrp="1"/>
+          </p:cNvSpPr>
+          <p:nvPr/>
+        </p:nvSpPr>
+        <p:spPr>
+          <a:xfrm>
+            <a:off x="4343400" y="-329184"/>
+            <a:ext cx="4572000" cy="274320"/>
+          </a:xfrm>
+          <a:prstGeom prst="rect">
+            <a:avLst/>
+          </a:prstGeom>
+        </p:spPr>
+        <p:txBody>
+          <a:bodyPr anchor="b"/>
+          <a:lstStyle/>
+          <a:p>
+            <a:pPr algn="r">
+              <a:defRPr sz="900">
+                <a:solidFill>
+                  <a:srgbClr val="9AA7B6"/>
+                </a:solidFill>
+                <a:latin typeface="Poppins"/>
+              </a:defRPr>
+            </a:pPr>
+            <a:r>
+              <a:rPr lang="fr-FR" sz="900">
+                <a:solidFill>
+                  <a:srgbClr val="9AA7B6"/>
+                </a:solidFill>
+                <a:latin typeface="Poppins"/>
+              </a:rPr>
+              <a:t>Université de Mostaganem — Dr. Madani BELACEL</a:t>
+            </a:r>
+          </a:p>
+        </p:txBody>
+      </p:sp>
     </p:spTree>
   </p:cSld>
   <p:clrMapOvr>
@@ -4324,9 +4385,7 @@
   <p:cSld>
     <p:bg>
       <p:bgPr>
-        <a:solidFill>
-          <a:srgbClr val="0B3D2E"/>
-        </a:solidFill>
+        <a:solidFill>val="004A38"/&gt;</a:solidFill>
         <a:effectLst/>
       </p:bgPr>
     </p:bg>
@@ -4351,9 +4410,7 @@
           <a:prstGeom prst="rect">
             <a:avLst/>
           </a:prstGeom>
-          <a:solidFill>
-            <a:srgbClr val="146B4A"/>
-          </a:solidFill>
+          <a:solidFill>val="007A55"/&gt;</a:solidFill>
           <a:ln>
             <a:noFill/>
           </a:ln>
@@ -4395,9 +4452,7 @@
           <a:prstGeom prst="rect">
             <a:avLst/>
           </a:prstGeom>
-          <a:solidFill>
-            <a:srgbClr val="FFD700"/>
-          </a:solidFill>
+          <a:solidFill>val="F0B429"/&gt;</a:solidFill>
           <a:ln>
             <a:noFill/>
           </a:ln>
@@ -4439,9 +4494,7 @@
           <a:prstGeom prst="rect">
             <a:avLst/>
           </a:prstGeom>
-          <a:solidFill>
-            <a:srgbClr val="FFD700"/>
-          </a:solidFill>
+          <a:solidFill>val="F0B429"/&gt;</a:solidFill>
           <a:ln>
             <a:noFill/>
           </a:ln>
@@ -4483,9 +4536,7 @@
           <a:prstGeom prst="rect">
             <a:avLst/>
           </a:prstGeom>
-          <a:solidFill>
-            <a:srgbClr val="146B4A"/>
-          </a:solidFill>
+          <a:solidFill>val="007A55"/&gt;</a:solidFill>
           <a:ln>
             <a:noFill/>
           </a:ln>
@@ -4538,10 +4589,8 @@
             <a:pPr algn="l"/>
             <a:r>
               <a:rPr sz="2400" b="1" i="0">
-                <a:solidFill>
-                  <a:srgbClr val="FFD700"/>
-                </a:solidFill>
-                <a:latin typeface="Calibri"/>
+                <a:solidFill>val="F0B429"/&gt;</a:solidFill>
+                <a:latin typeface="Poppins"/>
               </a:rPr>
               <a:t>5 - Adressage IP</a:t>
             </a:r>
@@ -4562,9 +4611,7 @@
           <a:prstGeom prst="rect">
             <a:avLst/>
           </a:prstGeom>
-          <a:solidFill>
-            <a:srgbClr val="146B4A"/>
-          </a:solidFill>
+          <a:solidFill>val="007A55"/&gt;</a:solidFill>
           <a:ln>
             <a:noFill/>
           </a:ln>
@@ -4621,10 +4668,8 @@
             </a:pPr>
             <a:r>
               <a:rPr sz="1800">
-                <a:solidFill>
-                  <a:srgbClr val="FFFFFF"/>
-                </a:solidFill>
-                <a:latin typeface="Calibri"/>
+                <a:solidFill>val="FFFFFF"/&gt;</a:solidFill>
+                <a:latin typeface="Poppins"/>
               </a:rPr>
               <a:t>▪  IPv4 : adresse sur 32 bits (ex : 192.168.1.10).</a:t>
             </a:r>
@@ -4637,10 +4682,8 @@
             </a:pPr>
             <a:r>
               <a:rPr sz="1800">
-                <a:solidFill>
-                  <a:srgbClr val="FFFFFF"/>
-                </a:solidFill>
-                <a:latin typeface="Calibri"/>
+                <a:solidFill>val="FFFFFF"/&gt;</a:solidFill>
+                <a:latin typeface="Poppins"/>
               </a:rPr>
               <a:t>▪  Classes et masque de sous-réseau (/24, /16...).</a:t>
             </a:r>
@@ -4653,10 +4696,8 @@
             </a:pPr>
             <a:r>
               <a:rPr sz="1800">
-                <a:solidFill>
-                  <a:srgbClr val="FFFFFF"/>
-                </a:solidFill>
-                <a:latin typeface="Calibri"/>
+                <a:solidFill>val="FFFFFF"/&gt;</a:solidFill>
+                <a:latin typeface="Poppins"/>
               </a:rPr>
               <a:t>▪  Adresses privées vs publiques ; NAT pour sortir sur Internet.</a:t>
             </a:r>
@@ -4669,10 +4710,8 @@
             </a:pPr>
             <a:r>
               <a:rPr sz="1800">
-                <a:solidFill>
-                  <a:srgbClr val="FFFFFF"/>
-                </a:solidFill>
-                <a:latin typeface="Calibri"/>
+                <a:solidFill>val="FFFFFF"/&gt;</a:solidFill>
+                <a:latin typeface="Poppins"/>
               </a:rPr>
               <a:t>▪  IPv6 : 128 bits, espace quasi illimité.</a:t>
             </a:r>
@@ -4685,10 +4724,8 @@
             </a:pPr>
             <a:r>
               <a:rPr sz="1800">
-                <a:solidFill>
-                  <a:srgbClr val="FFFFFF"/>
-                </a:solidFill>
-                <a:latin typeface="Calibri"/>
+                <a:solidFill>val="FFFFFF"/&gt;</a:solidFill>
+                <a:latin typeface="Poppins"/>
               </a:rPr>
               <a:t>▪  DHCP : attribution automatique des adresses.</a:t>
             </a:r>
@@ -4719,6 +4756,47 @@
           </a:prstGeom>
         </p:spPr>
       </p:pic>
+      <p:sp>
+        <p:nvSpPr>
+          <p:cNvPr id="990001" name="Pied de page FLE"/>
+          <p:cNvSpPr>
+            <a:spLocks noGrp="1"/>
+          </p:cNvSpPr>
+          <p:nvPr/>
+        </p:nvSpPr>
+        <p:spPr>
+          <a:xfrm>
+            <a:off x="4343400" y="-329184"/>
+            <a:ext cx="4572000" cy="274320"/>
+          </a:xfrm>
+          <a:prstGeom prst="rect">
+            <a:avLst/>
+          </a:prstGeom>
+        </p:spPr>
+        <p:txBody>
+          <a:bodyPr anchor="b"/>
+          <a:lstStyle/>
+          <a:p>
+            <a:pPr algn="r">
+              <a:defRPr sz="900">
+                <a:solidFill>
+                  <a:srgbClr val="9AA7B6"/>
+                </a:solidFill>
+                <a:latin typeface="Poppins"/>
+              </a:defRPr>
+            </a:pPr>
+            <a:r>
+              <a:rPr lang="fr-FR" sz="900">
+                <a:solidFill>
+                  <a:srgbClr val="9AA7B6"/>
+                </a:solidFill>
+                <a:latin typeface="Poppins"/>
+              </a:rPr>
+              <a:t>Université de Mostaganem — Dr. Madani BELACEL</a:t>
+            </a:r>
+          </a:p>
+        </p:txBody>
+      </p:sp>
     </p:spTree>
   </p:cSld>
   <p:clrMapOvr>
@@ -4732,9 +4810,7 @@
   <p:cSld>
     <p:bg>
       <p:bgPr>
-        <a:solidFill>
-          <a:srgbClr val="0B3D2E"/>
-        </a:solidFill>
+        <a:solidFill>val="004A38"/&gt;</a:solidFill>
         <a:effectLst/>
       </p:bgPr>
     </p:bg>
@@ -4759,9 +4835,7 @@
           <a:prstGeom prst="rect">
             <a:avLst/>
           </a:prstGeom>
-          <a:solidFill>
-            <a:srgbClr val="146B4A"/>
-          </a:solidFill>
+          <a:solidFill>val="007A55"/&gt;</a:solidFill>
           <a:ln>
             <a:noFill/>
           </a:ln>
@@ -4803,9 +4877,7 @@
           <a:prstGeom prst="rect">
             <a:avLst/>
           </a:prstGeom>
-          <a:solidFill>
-            <a:srgbClr val="FFD700"/>
-          </a:solidFill>
+          <a:solidFill>val="F0B429"/&gt;</a:solidFill>
           <a:ln>
             <a:noFill/>
           </a:ln>
@@ -4847,9 +4919,7 @@
           <a:prstGeom prst="rect">
             <a:avLst/>
           </a:prstGeom>
-          <a:solidFill>
-            <a:srgbClr val="FFD700"/>
-          </a:solidFill>
+          <a:solidFill>val="F0B429"/&gt;</a:solidFill>
           <a:ln>
             <a:noFill/>
           </a:ln>
@@ -4891,9 +4961,7 @@
           <a:prstGeom prst="rect">
             <a:avLst/>
           </a:prstGeom>
-          <a:solidFill>
-            <a:srgbClr val="146B4A"/>
-          </a:solidFill>
+          <a:solidFill>val="007A55"/&gt;</a:solidFill>
           <a:ln>
             <a:noFill/>
           </a:ln>
@@ -4935,9 +5003,7 @@
           <a:prstGeom prst="rect">
             <a:avLst/>
           </a:prstGeom>
-          <a:solidFill>
-            <a:srgbClr val="146B4A"/>
-          </a:solidFill>
+          <a:solidFill>val="007A55"/&gt;</a:solidFill>
           <a:ln>
             <a:noFill/>
           </a:ln>
@@ -4990,10 +5056,8 @@
             <a:pPr algn="ctr"/>
             <a:r>
               <a:rPr sz="2200" b="1" i="0">
-                <a:solidFill>
-                  <a:srgbClr val="BBBBBB"/>
-                </a:solidFill>
-                <a:latin typeface="Calibri"/>
+                <a:solidFill>val="9AA7B6"/&gt;</a:solidFill>
+                <a:latin typeface="Poppins"/>
               </a:rPr>
               <a:t>Section 6</a:t>
             </a:r>
@@ -5025,10 +5089,8 @@
             <a:pPr algn="ctr"/>
             <a:r>
               <a:rPr sz="2800" b="1" i="0">
-                <a:solidFill>
-                  <a:srgbClr val="FFD700"/>
-                </a:solidFill>
-                <a:latin typeface="Calibri"/>
+                <a:solidFill>val="F0B429"/&gt;</a:solidFill>
+                <a:latin typeface="Poppins"/>
               </a:rPr>
               <a:t>Outils et diagnostic</a:t>
             </a:r>
@@ -5059,6 +5121,47 @@
           </a:prstGeom>
         </p:spPr>
       </p:pic>
+      <p:sp>
+        <p:nvSpPr>
+          <p:cNvPr id="990001" name="Pied de page FLE"/>
+          <p:cNvSpPr>
+            <a:spLocks noGrp="1"/>
+          </p:cNvSpPr>
+          <p:nvPr/>
+        </p:nvSpPr>
+        <p:spPr>
+          <a:xfrm>
+            <a:off x="4343400" y="-329184"/>
+            <a:ext cx="4572000" cy="274320"/>
+          </a:xfrm>
+          <a:prstGeom prst="rect">
+            <a:avLst/>
+          </a:prstGeom>
+        </p:spPr>
+        <p:txBody>
+          <a:bodyPr anchor="b"/>
+          <a:lstStyle/>
+          <a:p>
+            <a:pPr algn="r">
+              <a:defRPr sz="900">
+                <a:solidFill>
+                  <a:srgbClr val="9AA7B6"/>
+                </a:solidFill>
+                <a:latin typeface="Poppins"/>
+              </a:defRPr>
+            </a:pPr>
+            <a:r>
+              <a:rPr lang="fr-FR" sz="900">
+                <a:solidFill>
+                  <a:srgbClr val="9AA7B6"/>
+                </a:solidFill>
+                <a:latin typeface="Poppins"/>
+              </a:rPr>
+              <a:t>Université de Mostaganem — Dr. Madani BELACEL</a:t>
+            </a:r>
+          </a:p>
+        </p:txBody>
+      </p:sp>
     </p:spTree>
   </p:cSld>
   <p:clrMapOvr>
@@ -5072,9 +5175,7 @@
   <p:cSld>
     <p:bg>
       <p:bgPr>
-        <a:solidFill>
-          <a:srgbClr val="0B3D2E"/>
-        </a:solidFill>
+        <a:solidFill>val="004A38"/&gt;</a:solidFill>
         <a:effectLst/>
       </p:bgPr>
     </p:bg>
@@ -5099,9 +5200,7 @@
           <a:prstGeom prst="rect">
             <a:avLst/>
           </a:prstGeom>
-          <a:solidFill>
-            <a:srgbClr val="146B4A"/>
-          </a:solidFill>
+          <a:solidFill>val="007A55"/&gt;</a:solidFill>
           <a:ln>
             <a:noFill/>
           </a:ln>
@@ -5143,9 +5242,7 @@
           <a:prstGeom prst="rect">
             <a:avLst/>
           </a:prstGeom>
-          <a:solidFill>
-            <a:srgbClr val="FFD700"/>
-          </a:solidFill>
+          <a:solidFill>val="F0B429"/&gt;</a:solidFill>
           <a:ln>
             <a:noFill/>
           </a:ln>
@@ -5187,9 +5284,7 @@
           <a:prstGeom prst="rect">
             <a:avLst/>
           </a:prstGeom>
-          <a:solidFill>
-            <a:srgbClr val="FFD700"/>
-          </a:solidFill>
+          <a:solidFill>val="F0B429"/&gt;</a:solidFill>
           <a:ln>
             <a:noFill/>
           </a:ln>
@@ -5231,9 +5326,7 @@
           <a:prstGeom prst="rect">
             <a:avLst/>
           </a:prstGeom>
-          <a:solidFill>
-            <a:srgbClr val="146B4A"/>
-          </a:solidFill>
+          <a:solidFill>val="007A55"/&gt;</a:solidFill>
           <a:ln>
             <a:noFill/>
           </a:ln>
@@ -5286,10 +5379,8 @@
             <a:pPr algn="l"/>
             <a:r>
               <a:rPr sz="2400" b="1" i="0">
-                <a:solidFill>
-                  <a:srgbClr val="FFD700"/>
-                </a:solidFill>
-                <a:latin typeface="Calibri"/>
+                <a:solidFill>val="F0B429"/&gt;</a:solidFill>
+                <a:latin typeface="Poppins"/>
               </a:rPr>
               <a:t>6 - Outils et diagnostic</a:t>
             </a:r>
@@ -5310,9 +5401,7 @@
           <a:prstGeom prst="rect">
             <a:avLst/>
           </a:prstGeom>
-          <a:solidFill>
-            <a:srgbClr val="146B4A"/>
-          </a:solidFill>
+          <a:solidFill>val="007A55"/&gt;</a:solidFill>
           <a:ln>
             <a:noFill/>
           </a:ln>
@@ -5369,10 +5458,8 @@
             </a:pPr>
             <a:r>
               <a:rPr sz="1800">
-                <a:solidFill>
-                  <a:srgbClr val="FFFFFF"/>
-                </a:solidFill>
-                <a:latin typeface="Calibri"/>
+                <a:solidFill>val="FFFFFF"/&gt;</a:solidFill>
+                <a:latin typeface="Poppins"/>
               </a:rPr>
               <a:t>▪  ping : tester l'accessibilité d'une machine.</a:t>
             </a:r>
@@ -5385,10 +5472,8 @@
             </a:pPr>
             <a:r>
               <a:rPr sz="1800">
-                <a:solidFill>
-                  <a:srgbClr val="FFFFFF"/>
-                </a:solidFill>
-                <a:latin typeface="Calibri"/>
+                <a:solidFill>val="FFFFFF"/&gt;</a:solidFill>
+                <a:latin typeface="Poppins"/>
               </a:rPr>
               <a:t>▪  ipconfig / ifconfig : afficher sa configuration IP.</a:t>
             </a:r>
@@ -5401,10 +5486,8 @@
             </a:pPr>
             <a:r>
               <a:rPr sz="1800">
-                <a:solidFill>
-                  <a:srgbClr val="FFFFFF"/>
-                </a:solidFill>
-                <a:latin typeface="Calibri"/>
+                <a:solidFill>val="FFFFFF"/&gt;</a:solidFill>
+                <a:latin typeface="Poppins"/>
               </a:rPr>
               <a:t>▪  tracert : suivre le chemin jusqu'à une destination.</a:t>
             </a:r>
@@ -5417,10 +5500,8 @@
             </a:pPr>
             <a:r>
               <a:rPr sz="1800">
-                <a:solidFill>
-                  <a:srgbClr val="FFFFFF"/>
-                </a:solidFill>
-                <a:latin typeface="Calibri"/>
+                <a:solidFill>val="FFFFFF"/&gt;</a:solidFill>
+                <a:latin typeface="Poppins"/>
               </a:rPr>
               <a:t>▪  nslookup : interroger le DNS.</a:t>
             </a:r>
@@ -5433,10 +5514,8 @@
             </a:pPr>
             <a:r>
               <a:rPr sz="1800">
-                <a:solidFill>
-                  <a:srgbClr val="FFFFFF"/>
-                </a:solidFill>
-                <a:latin typeface="Calibri"/>
+                <a:solidFill>val="FFFFFF"/&gt;</a:solidFill>
+                <a:latin typeface="Poppins"/>
               </a:rPr>
               <a:t>▪  Câble testeur et voyants des équipements.</a:t>
             </a:r>
@@ -5467,6 +5546,47 @@
           </a:prstGeom>
         </p:spPr>
       </p:pic>
+      <p:sp>
+        <p:nvSpPr>
+          <p:cNvPr id="990001" name="Pied de page FLE"/>
+          <p:cNvSpPr>
+            <a:spLocks noGrp="1"/>
+          </p:cNvSpPr>
+          <p:nvPr/>
+        </p:nvSpPr>
+        <p:spPr>
+          <a:xfrm>
+            <a:off x="4343400" y="-329184"/>
+            <a:ext cx="4572000" cy="274320"/>
+          </a:xfrm>
+          <a:prstGeom prst="rect">
+            <a:avLst/>
+          </a:prstGeom>
+        </p:spPr>
+        <p:txBody>
+          <a:bodyPr anchor="b"/>
+          <a:lstStyle/>
+          <a:p>
+            <a:pPr algn="r">
+              <a:defRPr sz="900">
+                <a:solidFill>
+                  <a:srgbClr val="9AA7B6"/>
+                </a:solidFill>
+                <a:latin typeface="Poppins"/>
+              </a:defRPr>
+            </a:pPr>
+            <a:r>
+              <a:rPr lang="fr-FR" sz="900">
+                <a:solidFill>
+                  <a:srgbClr val="9AA7B6"/>
+                </a:solidFill>
+                <a:latin typeface="Poppins"/>
+              </a:rPr>
+              <a:t>Université de Mostaganem — Dr. Madani BELACEL</a:t>
+            </a:r>
+          </a:p>
+        </p:txBody>
+      </p:sp>
     </p:spTree>
   </p:cSld>
   <p:clrMapOvr>
@@ -5480,9 +5600,7 @@
   <p:cSld>
     <p:bg>
       <p:bgPr>
-        <a:solidFill>
-          <a:srgbClr val="0B3D2E"/>
-        </a:solidFill>
+        <a:solidFill>val="004A38"/&gt;</a:solidFill>
         <a:effectLst/>
       </p:bgPr>
     </p:bg>
@@ -5507,9 +5625,7 @@
           <a:prstGeom prst="rect">
             <a:avLst/>
           </a:prstGeom>
-          <a:solidFill>
-            <a:srgbClr val="146B4A"/>
-          </a:solidFill>
+          <a:solidFill>val="007A55"/&gt;</a:solidFill>
           <a:ln>
             <a:noFill/>
           </a:ln>
@@ -5551,9 +5667,7 @@
           <a:prstGeom prst="rect">
             <a:avLst/>
           </a:prstGeom>
-          <a:solidFill>
-            <a:srgbClr val="FFD700"/>
-          </a:solidFill>
+          <a:solidFill>val="F0B429"/&gt;</a:solidFill>
           <a:ln>
             <a:noFill/>
           </a:ln>
@@ -5595,9 +5709,7 @@
           <a:prstGeom prst="rect">
             <a:avLst/>
           </a:prstGeom>
-          <a:solidFill>
-            <a:srgbClr val="FFD700"/>
-          </a:solidFill>
+          <a:solidFill>val="F0B429"/&gt;</a:solidFill>
           <a:ln>
             <a:noFill/>
           </a:ln>
@@ -5639,9 +5751,7 @@
           <a:prstGeom prst="rect">
             <a:avLst/>
           </a:prstGeom>
-          <a:solidFill>
-            <a:srgbClr val="146B4A"/>
-          </a:solidFill>
+          <a:solidFill>val="007A55"/&gt;</a:solidFill>
           <a:ln>
             <a:noFill/>
           </a:ln>
@@ -5683,9 +5793,7 @@
           <a:prstGeom prst="rect">
             <a:avLst/>
           </a:prstGeom>
-          <a:solidFill>
-            <a:srgbClr val="146B4A"/>
-          </a:solidFill>
+          <a:solidFill>val="007A55"/&gt;</a:solidFill>
           <a:ln>
             <a:noFill/>
           </a:ln>
@@ -5738,10 +5846,8 @@
             <a:pPr algn="ctr"/>
             <a:r>
               <a:rPr sz="2200" b="1" i="0">
-                <a:solidFill>
-                  <a:srgbClr val="BBBBBB"/>
-                </a:solidFill>
-                <a:latin typeface="Calibri"/>
+                <a:solidFill>val="9AA7B6"/&gt;</a:solidFill>
+                <a:latin typeface="Poppins"/>
               </a:rPr>
               <a:t>Section 7</a:t>
             </a:r>
@@ -5773,10 +5879,8 @@
             <a:pPr algn="ctr"/>
             <a:r>
               <a:rPr sz="2800" b="1" i="0">
-                <a:solidFill>
-                  <a:srgbClr val="FFD700"/>
-                </a:solidFill>
-                <a:latin typeface="Calibri"/>
+                <a:solidFill>val="F0B429"/&gt;</a:solidFill>
+                <a:latin typeface="Poppins"/>
               </a:rPr>
               <a:t>Sécurité des réseaux</a:t>
             </a:r>
@@ -5807,6 +5911,47 @@
           </a:prstGeom>
         </p:spPr>
       </p:pic>
+      <p:sp>
+        <p:nvSpPr>
+          <p:cNvPr id="990001" name="Pied de page FLE"/>
+          <p:cNvSpPr>
+            <a:spLocks noGrp="1"/>
+          </p:cNvSpPr>
+          <p:nvPr/>
+        </p:nvSpPr>
+        <p:spPr>
+          <a:xfrm>
+            <a:off x="4343400" y="-329184"/>
+            <a:ext cx="4572000" cy="274320"/>
+          </a:xfrm>
+          <a:prstGeom prst="rect">
+            <a:avLst/>
+          </a:prstGeom>
+        </p:spPr>
+        <p:txBody>
+          <a:bodyPr anchor="b"/>
+          <a:lstStyle/>
+          <a:p>
+            <a:pPr algn="r">
+              <a:defRPr sz="900">
+                <a:solidFill>
+                  <a:srgbClr val="9AA7B6"/>
+                </a:solidFill>
+                <a:latin typeface="Poppins"/>
+              </a:defRPr>
+            </a:pPr>
+            <a:r>
+              <a:rPr lang="fr-FR" sz="900">
+                <a:solidFill>
+                  <a:srgbClr val="9AA7B6"/>
+                </a:solidFill>
+                <a:latin typeface="Poppins"/>
+              </a:rPr>
+              <a:t>Université de Mostaganem — Dr. Madani BELACEL</a:t>
+            </a:r>
+          </a:p>
+        </p:txBody>
+      </p:sp>
     </p:spTree>
   </p:cSld>
   <p:clrMapOvr>
@@ -5820,9 +5965,7 @@
   <p:cSld>
     <p:bg>
       <p:bgPr>
-        <a:solidFill>
-          <a:srgbClr val="0B3D2E"/>
-        </a:solidFill>
+        <a:solidFill>val="004A38"/&gt;</a:solidFill>
         <a:effectLst/>
       </p:bgPr>
     </p:bg>
@@ -5847,9 +5990,7 @@
           <a:prstGeom prst="rect">
             <a:avLst/>
           </a:prstGeom>
-          <a:solidFill>
-            <a:srgbClr val="146B4A"/>
-          </a:solidFill>
+          <a:solidFill>val="007A55"/&gt;</a:solidFill>
           <a:ln>
             <a:noFill/>
           </a:ln>
@@ -5891,9 +6032,7 @@
           <a:prstGeom prst="rect">
             <a:avLst/>
           </a:prstGeom>
-          <a:solidFill>
-            <a:srgbClr val="FFD700"/>
-          </a:solidFill>
+          <a:solidFill>val="F0B429"/&gt;</a:solidFill>
           <a:ln>
             <a:noFill/>
           </a:ln>
@@ -5935,9 +6074,7 @@
           <a:prstGeom prst="rect">
             <a:avLst/>
           </a:prstGeom>
-          <a:solidFill>
-            <a:srgbClr val="FFD700"/>
-          </a:solidFill>
+          <a:solidFill>val="F0B429"/&gt;</a:solidFill>
           <a:ln>
             <a:noFill/>
           </a:ln>
@@ -5979,9 +6116,7 @@
           <a:prstGeom prst="rect">
             <a:avLst/>
           </a:prstGeom>
-          <a:solidFill>
-            <a:srgbClr val="146B4A"/>
-          </a:solidFill>
+          <a:solidFill>val="007A55"/&gt;</a:solidFill>
           <a:ln>
             <a:noFill/>
           </a:ln>
@@ -6034,10 +6169,8 @@
             <a:pPr algn="l"/>
             <a:r>
               <a:rPr sz="2400" b="1" i="0">
-                <a:solidFill>
-                  <a:srgbClr val="FFD700"/>
-                </a:solidFill>
-                <a:latin typeface="Calibri"/>
+                <a:solidFill>val="F0B429"/&gt;</a:solidFill>
+                <a:latin typeface="Poppins"/>
               </a:rPr>
               <a:t>7 - Sécurité des réseaux</a:t>
             </a:r>
@@ -6058,9 +6191,7 @@
           <a:prstGeom prst="rect">
             <a:avLst/>
           </a:prstGeom>
-          <a:solidFill>
-            <a:srgbClr val="146B4A"/>
-          </a:solidFill>
+          <a:solidFill>val="007A55"/&gt;</a:solidFill>
           <a:ln>
             <a:noFill/>
           </a:ln>
@@ -6117,10 +6248,8 @@
             </a:pPr>
             <a:r>
               <a:rPr sz="1800">
-                <a:solidFill>
-                  <a:srgbClr val="FFFFFF"/>
-                </a:solidFill>
-                <a:latin typeface="Calibri"/>
+                <a:solidFill>val="FFFFFF"/&gt;</a:solidFill>
+                <a:latin typeface="Poppins"/>
               </a:rPr>
               <a:t>▪  Pare-feu : filtrer les flux entrants et sortants.</a:t>
             </a:r>
@@ -6133,10 +6262,8 @@
             </a:pPr>
             <a:r>
               <a:rPr sz="1800">
-                <a:solidFill>
-                  <a:srgbClr val="FFFFFF"/>
-                </a:solidFill>
-                <a:latin typeface="Calibri"/>
+                <a:solidFill>val="FFFFFF"/&gt;</a:solidFill>
+                <a:latin typeface="Poppins"/>
               </a:rPr>
               <a:t>▪  Wi-Fi sécurisé : WPA2/WPA3 avec mot de passe fort.</a:t>
             </a:r>
@@ -6149,10 +6276,8 @@
             </a:pPr>
             <a:r>
               <a:rPr sz="1800">
-                <a:solidFill>
-                  <a:srgbClr val="FFFFFF"/>
-                </a:solidFill>
-                <a:latin typeface="Calibri"/>
+                <a:solidFill>val="FFFFFF"/&gt;</a:solidFill>
+                <a:latin typeface="Poppins"/>
               </a:rPr>
               <a:t>▪  VPN : tunnel chiffré pour l'accès distant.</a:t>
             </a:r>
@@ -6165,10 +6290,8 @@
             </a:pPr>
             <a:r>
               <a:rPr sz="1800">
-                <a:solidFill>
-                  <a:srgbClr val="FFFFFF"/>
-                </a:solidFill>
-                <a:latin typeface="Calibri"/>
+                <a:solidFill>val="FFFFFF"/&gt;</a:solidFill>
+                <a:latin typeface="Poppins"/>
               </a:rPr>
               <a:t>▪  Surveillance : journaux, détection d'intrusion.</a:t>
             </a:r>
@@ -6199,6 +6322,47 @@
           </a:prstGeom>
         </p:spPr>
       </p:pic>
+      <p:sp>
+        <p:nvSpPr>
+          <p:cNvPr id="990001" name="Pied de page FLE"/>
+          <p:cNvSpPr>
+            <a:spLocks noGrp="1"/>
+          </p:cNvSpPr>
+          <p:nvPr/>
+        </p:nvSpPr>
+        <p:spPr>
+          <a:xfrm>
+            <a:off x="4343400" y="-329184"/>
+            <a:ext cx="4572000" cy="274320"/>
+          </a:xfrm>
+          <a:prstGeom prst="rect">
+            <a:avLst/>
+          </a:prstGeom>
+        </p:spPr>
+        <p:txBody>
+          <a:bodyPr anchor="b"/>
+          <a:lstStyle/>
+          <a:p>
+            <a:pPr algn="r">
+              <a:defRPr sz="900">
+                <a:solidFill>
+                  <a:srgbClr val="9AA7B6"/>
+                </a:solidFill>
+                <a:latin typeface="Poppins"/>
+              </a:defRPr>
+            </a:pPr>
+            <a:r>
+              <a:rPr lang="fr-FR" sz="900">
+                <a:solidFill>
+                  <a:srgbClr val="9AA7B6"/>
+                </a:solidFill>
+                <a:latin typeface="Poppins"/>
+              </a:rPr>
+              <a:t>Université de Mostaganem — Dr. Madani BELACEL</a:t>
+            </a:r>
+          </a:p>
+        </p:txBody>
+      </p:sp>
     </p:spTree>
   </p:cSld>
   <p:clrMapOvr>
@@ -6212,9 +6376,7 @@
   <p:cSld>
     <p:bg>
       <p:bgPr>
-        <a:solidFill>
-          <a:srgbClr val="FF8C00"/>
-        </a:solidFill>
+        <a:solidFill>val="F0B429"/&gt;</a:solidFill>
         <a:effectLst/>
       </p:bgPr>
     </p:bg>
@@ -6239,9 +6401,7 @@
           <a:prstGeom prst="rect">
             <a:avLst/>
           </a:prstGeom>
-          <a:solidFill>
-            <a:srgbClr val="146B4A"/>
-          </a:solidFill>
+          <a:solidFill>val="007A55"/&gt;</a:solidFill>
           <a:ln>
             <a:noFill/>
           </a:ln>
@@ -6283,9 +6443,7 @@
           <a:prstGeom prst="rect">
             <a:avLst/>
           </a:prstGeom>
-          <a:solidFill>
-            <a:srgbClr val="FFD700"/>
-          </a:solidFill>
+          <a:solidFill>val="F0B429"/&gt;</a:solidFill>
           <a:ln>
             <a:noFill/>
           </a:ln>
@@ -6327,9 +6485,7 @@
           <a:prstGeom prst="rect">
             <a:avLst/>
           </a:prstGeom>
-          <a:solidFill>
-            <a:srgbClr val="FFD700"/>
-          </a:solidFill>
+          <a:solidFill>val="F0B429"/&gt;</a:solidFill>
           <a:ln>
             <a:noFill/>
           </a:ln>
@@ -6371,9 +6527,7 @@
           <a:prstGeom prst="rect">
             <a:avLst/>
           </a:prstGeom>
-          <a:solidFill>
-            <a:srgbClr val="146B4A"/>
-          </a:solidFill>
+          <a:solidFill>val="007A55"/&gt;</a:solidFill>
           <a:ln>
             <a:noFill/>
           </a:ln>
@@ -6426,10 +6580,8 @@
             <a:pPr algn="ctr"/>
             <a:r>
               <a:rPr sz="3000" b="1" i="0">
-                <a:solidFill>
-                  <a:srgbClr val="0B3D2E"/>
-                </a:solidFill>
-                <a:latin typeface="Calibri"/>
+                <a:solidFill>val="004A38"/&gt;</a:solidFill>
+                <a:latin typeface="Poppins"/>
               </a:rPr>
               <a:t>Intérêt pratique</a:t>
             </a:r>
@@ -6465,10 +6617,8 @@
             </a:pPr>
             <a:r>
               <a:rPr sz="1700">
-                <a:solidFill>
-                  <a:srgbClr val="0B3D2E"/>
-                </a:solidFill>
-                <a:latin typeface="Calibri"/>
+                <a:solidFill>val="004A38"/&gt;</a:solidFill>
+                <a:latin typeface="Poppins"/>
               </a:rPr>
               <a:t>▪  Installer et configurer un petit réseau local (domicile, labo).</a:t>
             </a:r>
@@ -6481,10 +6631,8 @@
             </a:pPr>
             <a:r>
               <a:rPr sz="1700">
-                <a:solidFill>
-                  <a:srgbClr val="0B3D2E"/>
-                </a:solidFill>
-                <a:latin typeface="Calibri"/>
+                <a:solidFill>val="004A38"/&gt;</a:solidFill>
+                <a:latin typeface="Poppins"/>
               </a:rPr>
               <a:t>▪  Partager imprimantes et fichiers entre collègues.</a:t>
             </a:r>
@@ -6497,10 +6645,8 @@
             </a:pPr>
             <a:r>
               <a:rPr sz="1700">
-                <a:solidFill>
-                  <a:srgbClr val="0B3D2E"/>
-                </a:solidFill>
-                <a:latin typeface="Calibri"/>
+                <a:solidFill>val="004A38"/&gt;</a:solidFill>
+                <a:latin typeface="Poppins"/>
               </a:rPr>
               <a:t>▪  Diagnostiquer une panne réseau avec ping et ipconfig.</a:t>
             </a:r>
@@ -6513,10 +6659,8 @@
             </a:pPr>
             <a:r>
               <a:rPr sz="1700">
-                <a:solidFill>
-                  <a:srgbClr val="0B3D2E"/>
-                </a:solidFill>
-                <a:latin typeface="Calibri"/>
+                <a:solidFill>val="004A38"/&gt;</a:solidFill>
+                <a:latin typeface="Poppins"/>
               </a:rPr>
               <a:t>▪  Comprendre la base nécessaire aux certifications réseau (CCNA...).</a:t>
             </a:r>
@@ -6547,6 +6691,47 @@
           </a:prstGeom>
         </p:spPr>
       </p:pic>
+      <p:sp>
+        <p:nvSpPr>
+          <p:cNvPr id="990001" name="Pied de page FLE"/>
+          <p:cNvSpPr>
+            <a:spLocks noGrp="1"/>
+          </p:cNvSpPr>
+          <p:nvPr/>
+        </p:nvSpPr>
+        <p:spPr>
+          <a:xfrm>
+            <a:off x="4343400" y="-329184"/>
+            <a:ext cx="4572000" cy="274320"/>
+          </a:xfrm>
+          <a:prstGeom prst="rect">
+            <a:avLst/>
+          </a:prstGeom>
+        </p:spPr>
+        <p:txBody>
+          <a:bodyPr anchor="b"/>
+          <a:lstStyle/>
+          <a:p>
+            <a:pPr algn="r">
+              <a:defRPr sz="900">
+                <a:solidFill>
+                  <a:srgbClr val="9AA7B6"/>
+                </a:solidFill>
+                <a:latin typeface="Poppins"/>
+              </a:defRPr>
+            </a:pPr>
+            <a:r>
+              <a:rPr lang="fr-FR" sz="900">
+                <a:solidFill>
+                  <a:srgbClr val="9AA7B6"/>
+                </a:solidFill>
+                <a:latin typeface="Poppins"/>
+              </a:rPr>
+              <a:t>Université de Mostaganem — Dr. Madani BELACEL</a:t>
+            </a:r>
+          </a:p>
+        </p:txBody>
+      </p:sp>
     </p:spTree>
   </p:cSld>
   <p:clrMapOvr>
@@ -6560,9 +6745,7 @@
   <p:cSld>
     <p:bg>
       <p:bgPr>
-        <a:solidFill>
-          <a:srgbClr val="0B3D2E"/>
-        </a:solidFill>
+        <a:solidFill>val="004A38"/&gt;</a:solidFill>
         <a:effectLst/>
       </p:bgPr>
     </p:bg>
@@ -6587,9 +6770,7 @@
           <a:prstGeom prst="rect">
             <a:avLst/>
           </a:prstGeom>
-          <a:solidFill>
-            <a:srgbClr val="146B4A"/>
-          </a:solidFill>
+          <a:solidFill>val="007A55"/&gt;</a:solidFill>
           <a:ln>
             <a:noFill/>
           </a:ln>
@@ -6631,9 +6812,7 @@
           <a:prstGeom prst="rect">
             <a:avLst/>
           </a:prstGeom>
-          <a:solidFill>
-            <a:srgbClr val="FFD700"/>
-          </a:solidFill>
+          <a:solidFill>val="F0B429"/&gt;</a:solidFill>
           <a:ln>
             <a:noFill/>
           </a:ln>
@@ -6675,9 +6854,7 @@
           <a:prstGeom prst="rect">
             <a:avLst/>
           </a:prstGeom>
-          <a:solidFill>
-            <a:srgbClr val="FFD700"/>
-          </a:solidFill>
+          <a:solidFill>val="F0B429"/&gt;</a:solidFill>
           <a:ln>
             <a:noFill/>
           </a:ln>
@@ -6719,9 +6896,7 @@
           <a:prstGeom prst="rect">
             <a:avLst/>
           </a:prstGeom>
-          <a:solidFill>
-            <a:srgbClr val="146B4A"/>
-          </a:solidFill>
+          <a:solidFill>val="007A55"/&gt;</a:solidFill>
           <a:ln>
             <a:noFill/>
           </a:ln>
@@ -6774,10 +6949,8 @@
             <a:pPr algn="l"/>
             <a:r>
               <a:rPr sz="2600" b="1" i="0">
-                <a:solidFill>
-                  <a:srgbClr val="FFD700"/>
-                </a:solidFill>
-                <a:latin typeface="Calibri"/>
+                <a:solidFill>val="F0B429"/&gt;</a:solidFill>
+                <a:latin typeface="Poppins"/>
               </a:rPr>
               <a:t>Auto-évaluation (QCM)</a:t>
             </a:r>
@@ -6798,9 +6971,7 @@
           <a:prstGeom prst="rect">
             <a:avLst/>
           </a:prstGeom>
-          <a:solidFill>
-            <a:srgbClr val="146B4A"/>
-          </a:solidFill>
+          <a:solidFill>val="007A55"/&gt;</a:solidFill>
           <a:ln>
             <a:noFill/>
           </a:ln>
@@ -6857,10 +7028,8 @@
             </a:pPr>
             <a:r>
               <a:rPr sz="1500" b="1">
-                <a:solidFill>
-                  <a:srgbClr val="FFFFFF"/>
-                </a:solidFill>
-                <a:latin typeface="Calibri"/>
+                <a:solidFill>val="FFFFFF"/&gt;</a:solidFill>
+                <a:latin typeface="Poppins"/>
               </a:rPr>
               <a:t>1. Un LAN désigne :</a:t>
             </a:r>
@@ -6873,10 +7042,8 @@
             </a:pPr>
             <a:r>
               <a:rPr sz="1400">
-                <a:solidFill>
-                  <a:srgbClr val="BBBBBB"/>
-                </a:solidFill>
-                <a:latin typeface="Calibri"/>
+                <a:solidFill>val="9AA7B6"/&gt;</a:solidFill>
+                <a:latin typeface="Poppins"/>
               </a:rPr>
               <a:t>      a) Un réseau local</a:t>
             </a:r>
@@ -6889,10 +7056,8 @@
             </a:pPr>
             <a:r>
               <a:rPr sz="1400">
-                <a:solidFill>
-                  <a:srgbClr val="BBBBBB"/>
-                </a:solidFill>
-                <a:latin typeface="Calibri"/>
+                <a:solidFill>val="9AA7B6"/&gt;</a:solidFill>
+                <a:latin typeface="Poppins"/>
               </a:rPr>
               <a:t>      b) Un réseau mondial</a:t>
             </a:r>
@@ -6905,10 +7070,8 @@
             </a:pPr>
             <a:r>
               <a:rPr sz="1400">
-                <a:solidFill>
-                  <a:srgbClr val="BBBBBB"/>
-                </a:solidFill>
-                <a:latin typeface="Calibri"/>
+                <a:solidFill>val="9AA7B6"/&gt;</a:solidFill>
+                <a:latin typeface="Poppins"/>
               </a:rPr>
               <a:t>      c) Un type de câble</a:t>
             </a:r>
@@ -6921,10 +7084,8 @@
             </a:pPr>
             <a:r>
               <a:rPr sz="1500" b="1">
-                <a:solidFill>
-                  <a:srgbClr val="FFFFFF"/>
-                </a:solidFill>
-                <a:latin typeface="Calibri"/>
+                <a:solidFill>val="FFFFFF"/&gt;</a:solidFill>
+                <a:latin typeface="Poppins"/>
               </a:rPr>
               <a:t>2. Combien de couches compte le modèle OSI ?</a:t>
             </a:r>
@@ -6937,10 +7098,8 @@
             </a:pPr>
             <a:r>
               <a:rPr sz="1400">
-                <a:solidFill>
-                  <a:srgbClr val="BBBBBB"/>
-                </a:solidFill>
-                <a:latin typeface="Calibri"/>
+                <a:solidFill>val="9AA7B6"/&gt;</a:solidFill>
+                <a:latin typeface="Poppins"/>
               </a:rPr>
               <a:t>      a) 4</a:t>
             </a:r>
@@ -6953,10 +7112,8 @@
             </a:pPr>
             <a:r>
               <a:rPr sz="1400">
-                <a:solidFill>
-                  <a:srgbClr val="BBBBBB"/>
-                </a:solidFill>
-                <a:latin typeface="Calibri"/>
+                <a:solidFill>val="9AA7B6"/&gt;</a:solidFill>
+                <a:latin typeface="Poppins"/>
               </a:rPr>
               <a:t>      b) 5</a:t>
             </a:r>
@@ -6969,10 +7126,8 @@
             </a:pPr>
             <a:r>
               <a:rPr sz="1400">
-                <a:solidFill>
-                  <a:srgbClr val="BBBBBB"/>
-                </a:solidFill>
-                <a:latin typeface="Calibri"/>
+                <a:solidFill>val="9AA7B6"/&gt;</a:solidFill>
+                <a:latin typeface="Poppins"/>
               </a:rPr>
               <a:t>      c) 7</a:t>
             </a:r>
@@ -6985,10 +7140,8 @@
             </a:pPr>
             <a:r>
               <a:rPr sz="1500" b="1">
-                <a:solidFill>
-                  <a:srgbClr val="FFFFFF"/>
-                </a:solidFill>
-                <a:latin typeface="Calibri"/>
+                <a:solidFill>val="FFFFFF"/&gt;</a:solidFill>
+                <a:latin typeface="Poppins"/>
               </a:rPr>
               <a:t>3. Quelle commande teste la connexion vers une machine ?</a:t>
             </a:r>
@@ -7001,10 +7154,8 @@
             </a:pPr>
             <a:r>
               <a:rPr sz="1400">
-                <a:solidFill>
-                  <a:srgbClr val="BBBBBB"/>
-                </a:solidFill>
-                <a:latin typeface="Calibri"/>
+                <a:solidFill>val="9AA7B6"/&gt;</a:solidFill>
+                <a:latin typeface="Poppins"/>
               </a:rPr>
               <a:t>      a) ping</a:t>
             </a:r>
@@ -7017,10 +7168,8 @@
             </a:pPr>
             <a:r>
               <a:rPr sz="1400">
-                <a:solidFill>
-                  <a:srgbClr val="BBBBBB"/>
-                </a:solidFill>
-                <a:latin typeface="Calibri"/>
+                <a:solidFill>val="9AA7B6"/&gt;</a:solidFill>
+                <a:latin typeface="Poppins"/>
               </a:rPr>
               <a:t>      b) dir</a:t>
             </a:r>
@@ -7033,10 +7182,8 @@
             </a:pPr>
             <a:r>
               <a:rPr sz="1400">
-                <a:solidFill>
-                  <a:srgbClr val="BBBBBB"/>
-                </a:solidFill>
-                <a:latin typeface="Calibri"/>
+                <a:solidFill>val="9AA7B6"/&gt;</a:solidFill>
+                <a:latin typeface="Poppins"/>
               </a:rPr>
               <a:t>      c) copy</a:t>
             </a:r>
@@ -7067,6 +7214,47 @@
           </a:prstGeom>
         </p:spPr>
       </p:pic>
+      <p:sp>
+        <p:nvSpPr>
+          <p:cNvPr id="990001" name="Pied de page FLE"/>
+          <p:cNvSpPr>
+            <a:spLocks noGrp="1"/>
+          </p:cNvSpPr>
+          <p:nvPr/>
+        </p:nvSpPr>
+        <p:spPr>
+          <a:xfrm>
+            <a:off x="4343400" y="-329184"/>
+            <a:ext cx="4572000" cy="274320"/>
+          </a:xfrm>
+          <a:prstGeom prst="rect">
+            <a:avLst/>
+          </a:prstGeom>
+        </p:spPr>
+        <p:txBody>
+          <a:bodyPr anchor="b"/>
+          <a:lstStyle/>
+          <a:p>
+            <a:pPr algn="r">
+              <a:defRPr sz="900">
+                <a:solidFill>
+                  <a:srgbClr val="9AA7B6"/>
+                </a:solidFill>
+                <a:latin typeface="Poppins"/>
+              </a:defRPr>
+            </a:pPr>
+            <a:r>
+              <a:rPr lang="fr-FR" sz="900">
+                <a:solidFill>
+                  <a:srgbClr val="9AA7B6"/>
+                </a:solidFill>
+                <a:latin typeface="Poppins"/>
+              </a:rPr>
+              <a:t>Université de Mostaganem — Dr. Madani BELACEL</a:t>
+            </a:r>
+          </a:p>
+        </p:txBody>
+      </p:sp>
     </p:spTree>
   </p:cSld>
   <p:clrMapOvr>
@@ -7080,9 +7268,7 @@
   <p:cSld>
     <p:bg>
       <p:bgPr>
-        <a:solidFill>
-          <a:srgbClr val="0B3D2E"/>
-        </a:solidFill>
+        <a:solidFill>val="004A38"/&gt;</a:solidFill>
         <a:effectLst/>
       </p:bgPr>
     </p:bg>
@@ -7107,9 +7293,7 @@
           <a:prstGeom prst="rect">
             <a:avLst/>
           </a:prstGeom>
-          <a:solidFill>
-            <a:srgbClr val="146B4A"/>
-          </a:solidFill>
+          <a:solidFill>val="007A55"/&gt;</a:solidFill>
           <a:ln>
             <a:noFill/>
           </a:ln>
@@ -7151,9 +7335,7 @@
           <a:prstGeom prst="rect">
             <a:avLst/>
           </a:prstGeom>
-          <a:solidFill>
-            <a:srgbClr val="FFD700"/>
-          </a:solidFill>
+          <a:solidFill>val="F0B429"/&gt;</a:solidFill>
           <a:ln>
             <a:noFill/>
           </a:ln>
@@ -7195,9 +7377,7 @@
           <a:prstGeom prst="rect">
             <a:avLst/>
           </a:prstGeom>
-          <a:solidFill>
-            <a:srgbClr val="FFD700"/>
-          </a:solidFill>
+          <a:solidFill>val="F0B429"/&gt;</a:solidFill>
           <a:ln>
             <a:noFill/>
           </a:ln>
@@ -7239,9 +7419,7 @@
           <a:prstGeom prst="rect">
             <a:avLst/>
           </a:prstGeom>
-          <a:solidFill>
-            <a:srgbClr val="146B4A"/>
-          </a:solidFill>
+          <a:solidFill>val="007A55"/&gt;</a:solidFill>
           <a:ln>
             <a:noFill/>
           </a:ln>
@@ -7294,10 +7472,8 @@
             <a:pPr algn="ctr"/>
             <a:r>
               <a:rPr sz="3000" b="1" i="0">
-                <a:solidFill>
-                  <a:srgbClr val="FFD700"/>
-                </a:solidFill>
-                <a:latin typeface="Calibri"/>
+                <a:solidFill>val="F0B429"/&gt;</a:solidFill>
+                <a:latin typeface="Poppins"/>
               </a:rPr>
               <a:t>Conclusion</a:t>
             </a:r>
@@ -7318,9 +7494,7 @@
           <a:prstGeom prst="rect">
             <a:avLst/>
           </a:prstGeom>
-          <a:solidFill>
-            <a:srgbClr val="146B4A"/>
-          </a:solidFill>
+          <a:solidFill>val="007A55"/&gt;</a:solidFill>
           <a:ln>
             <a:noFill/>
           </a:ln>
@@ -7377,10 +7551,8 @@
             </a:pPr>
             <a:r>
               <a:rPr sz="1800">
-                <a:solidFill>
-                  <a:srgbClr val="FFFFFF"/>
-                </a:solidFill>
-                <a:latin typeface="Calibri"/>
+                <a:solidFill>val="FFFFFF"/&gt;</a:solidFill>
+                <a:latin typeface="Poppins"/>
               </a:rPr>
               <a:t>▪  Les réseaux permettent le partage universel des ressources.</a:t>
             </a:r>
@@ -7393,10 +7565,8 @@
             </a:pPr>
             <a:r>
               <a:rPr sz="1800">
-                <a:solidFill>
-                  <a:srgbClr val="FFFFFF"/>
-                </a:solidFill>
-                <a:latin typeface="Calibri"/>
+                <a:solidFill>val="FFFFFF"/&gt;</a:solidFill>
+                <a:latin typeface="Poppins"/>
               </a:rPr>
               <a:t>▪  Topologie, adressage et protocoles en sont les fondements.</a:t>
             </a:r>
@@ -7409,10 +7579,8 @@
             </a:pPr>
             <a:r>
               <a:rPr sz="1800">
-                <a:solidFill>
-                  <a:srgbClr val="FFFFFF"/>
-                </a:solidFill>
-                <a:latin typeface="Calibri"/>
+                <a:solidFill>val="FFFFFF"/&gt;</a:solidFill>
+                <a:latin typeface="Poppins"/>
               </a:rPr>
               <a:t>▪  La sécurité réseau doit être pensée dès la conception.</a:t>
             </a:r>
@@ -7425,10 +7593,8 @@
             </a:pPr>
             <a:r>
               <a:rPr sz="1800">
-                <a:solidFill>
-                  <a:srgbClr val="FFFFFF"/>
-                </a:solidFill>
-                <a:latin typeface="Calibri"/>
+                <a:solidFill>val="FFFFFF"/&gt;</a:solidFill>
+                <a:latin typeface="Poppins"/>
               </a:rPr>
               <a:t>▪  Prochain cours : les services Internet.</a:t>
             </a:r>
@@ -7459,6 +7625,47 @@
           </a:prstGeom>
         </p:spPr>
       </p:pic>
+      <p:sp>
+        <p:nvSpPr>
+          <p:cNvPr id="990001" name="Pied de page FLE"/>
+          <p:cNvSpPr>
+            <a:spLocks noGrp="1"/>
+          </p:cNvSpPr>
+          <p:nvPr/>
+        </p:nvSpPr>
+        <p:spPr>
+          <a:xfrm>
+            <a:off x="4343400" y="-329184"/>
+            <a:ext cx="4572000" cy="274320"/>
+          </a:xfrm>
+          <a:prstGeom prst="rect">
+            <a:avLst/>
+          </a:prstGeom>
+        </p:spPr>
+        <p:txBody>
+          <a:bodyPr anchor="b"/>
+          <a:lstStyle/>
+          <a:p>
+            <a:pPr algn="r">
+              <a:defRPr sz="900">
+                <a:solidFill>
+                  <a:srgbClr val="9AA7B6"/>
+                </a:solidFill>
+                <a:latin typeface="Poppins"/>
+              </a:defRPr>
+            </a:pPr>
+            <a:r>
+              <a:rPr lang="fr-FR" sz="900">
+                <a:solidFill>
+                  <a:srgbClr val="9AA7B6"/>
+                </a:solidFill>
+                <a:latin typeface="Poppins"/>
+              </a:rPr>
+              <a:t>Université de Mostaganem — Dr. Madani BELACEL</a:t>
+            </a:r>
+          </a:p>
+        </p:txBody>
+      </p:sp>
     </p:spTree>
   </p:cSld>
   <p:clrMapOvr>
@@ -7472,9 +7679,7 @@
   <p:cSld>
     <p:bg>
       <p:bgPr>
-        <a:solidFill>
-          <a:srgbClr val="0B3D2E"/>
-        </a:solidFill>
+        <a:solidFill>val="004A38"/&gt;</a:solidFill>
         <a:effectLst/>
       </p:bgPr>
     </p:bg>
@@ -7499,9 +7704,7 @@
           <a:prstGeom prst="rect">
             <a:avLst/>
           </a:prstGeom>
-          <a:solidFill>
-            <a:srgbClr val="146B4A"/>
-          </a:solidFill>
+          <a:solidFill>val="007A55"/&gt;</a:solidFill>
           <a:ln>
             <a:noFill/>
           </a:ln>
@@ -7543,9 +7746,7 @@
           <a:prstGeom prst="rect">
             <a:avLst/>
           </a:prstGeom>
-          <a:solidFill>
-            <a:srgbClr val="FFD700"/>
-          </a:solidFill>
+          <a:solidFill>val="F0B429"/&gt;</a:solidFill>
           <a:ln>
             <a:noFill/>
           </a:ln>
@@ -7587,9 +7788,7 @@
           <a:prstGeom prst="rect">
             <a:avLst/>
           </a:prstGeom>
-          <a:solidFill>
-            <a:srgbClr val="FFD700"/>
-          </a:solidFill>
+          <a:solidFill>val="F0B429"/&gt;</a:solidFill>
           <a:ln>
             <a:noFill/>
           </a:ln>
@@ -7631,9 +7830,7 @@
           <a:prstGeom prst="rect">
             <a:avLst/>
           </a:prstGeom>
-          <a:solidFill>
-            <a:srgbClr val="146B4A"/>
-          </a:solidFill>
+          <a:solidFill>val="007A55"/&gt;</a:solidFill>
           <a:ln>
             <a:noFill/>
           </a:ln>
@@ -7686,10 +7883,8 @@
             <a:pPr algn="ctr"/>
             <a:r>
               <a:rPr sz="3200" b="1" i="0">
-                <a:solidFill>
-                  <a:srgbClr val="FFD700"/>
-                </a:solidFill>
-                <a:latin typeface="Calibri"/>
+                <a:solidFill>val="F0B429"/&gt;</a:solidFill>
+                <a:latin typeface="Poppins"/>
               </a:rPr>
               <a:t>Plan du cours</a:t>
             </a:r>
@@ -7725,10 +7920,8 @@
             </a:pPr>
             <a:r>
               <a:rPr sz="1900">
-                <a:solidFill>
-                  <a:srgbClr val="FFFFFF"/>
-                </a:solidFill>
-                <a:latin typeface="Calibri"/>
+                <a:solidFill>val="FFFFFF"/&gt;</a:solidFill>
+                <a:latin typeface="Poppins"/>
               </a:rPr>
               <a:t>▪  1. Qu'est-ce qu'un réseau ?</a:t>
             </a:r>
@@ -7741,10 +7934,8 @@
             </a:pPr>
             <a:r>
               <a:rPr sz="1900">
-                <a:solidFill>
-                  <a:srgbClr val="FFFFFF"/>
-                </a:solidFill>
-                <a:latin typeface="Calibri"/>
+                <a:solidFill>val="FFFFFF"/&gt;</a:solidFill>
+                <a:latin typeface="Poppins"/>
               </a:rPr>
               <a:t>▪  2. Types de réseaux</a:t>
             </a:r>
@@ -7757,10 +7948,8 @@
             </a:pPr>
             <a:r>
               <a:rPr sz="1900">
-                <a:solidFill>
-                  <a:srgbClr val="FFFFFF"/>
-                </a:solidFill>
-                <a:latin typeface="Calibri"/>
+                <a:solidFill>val="FFFFFF"/&gt;</a:solidFill>
+                <a:latin typeface="Poppins"/>
               </a:rPr>
               <a:t>▪  3. Topologies de réseaux</a:t>
             </a:r>
@@ -7773,10 +7962,8 @@
             </a:pPr>
             <a:r>
               <a:rPr sz="1900">
-                <a:solidFill>
-                  <a:srgbClr val="FFFFFF"/>
-                </a:solidFill>
-                <a:latin typeface="Calibri"/>
+                <a:solidFill>val="FFFFFF"/&gt;</a:solidFill>
+                <a:latin typeface="Poppins"/>
               </a:rPr>
               <a:t>▪  4. Le modèle OSI et TCP/IP</a:t>
             </a:r>
@@ -7789,10 +7976,8 @@
             </a:pPr>
             <a:r>
               <a:rPr sz="1900">
-                <a:solidFill>
-                  <a:srgbClr val="FFFFFF"/>
-                </a:solidFill>
-                <a:latin typeface="Calibri"/>
+                <a:solidFill>val="FFFFFF"/&gt;</a:solidFill>
+                <a:latin typeface="Poppins"/>
               </a:rPr>
               <a:t>▪  5. Adressage IP</a:t>
             </a:r>
@@ -7805,10 +7990,8 @@
             </a:pPr>
             <a:r>
               <a:rPr sz="1900">
-                <a:solidFill>
-                  <a:srgbClr val="FFFFFF"/>
-                </a:solidFill>
-                <a:latin typeface="Calibri"/>
+                <a:solidFill>val="FFFFFF"/&gt;</a:solidFill>
+                <a:latin typeface="Poppins"/>
               </a:rPr>
               <a:t>▪  6. Outils et diagnostic</a:t>
             </a:r>
@@ -7821,12 +8004,51 @@
             </a:pPr>
             <a:r>
               <a:rPr sz="1900">
-                <a:solidFill>
-                  <a:srgbClr val="FFFFFF"/>
-                </a:solidFill>
-                <a:latin typeface="Calibri"/>
+                <a:solidFill>val="FFFFFF"/&gt;</a:solidFill>
+                <a:latin typeface="Poppins"/>
               </a:rPr>
               <a:t>▪  7. Sécurité des réseaux</a:t>
+            </a:r>
+          </a:p>
+        </p:txBody>
+      </p:sp>
+      <p:sp>
+        <p:nvSpPr>
+          <p:cNvPr id="990001" name="Pied de page FLE"/>
+          <p:cNvSpPr>
+            <a:spLocks noGrp="1"/>
+          </p:cNvSpPr>
+          <p:nvPr/>
+        </p:nvSpPr>
+        <p:spPr>
+          <a:xfrm>
+            <a:off x="4343400" y="-329184"/>
+            <a:ext cx="4572000" cy="274320"/>
+          </a:xfrm>
+          <a:prstGeom prst="rect">
+            <a:avLst/>
+          </a:prstGeom>
+        </p:spPr>
+        <p:txBody>
+          <a:bodyPr anchor="b"/>
+          <a:lstStyle/>
+          <a:p>
+            <a:pPr algn="r">
+              <a:defRPr sz="900">
+                <a:solidFill>
+                  <a:srgbClr val="9AA7B6"/>
+                </a:solidFill>
+                <a:latin typeface="Poppins"/>
+              </a:defRPr>
+            </a:pPr>
+            <a:r>
+              <a:rPr lang="fr-FR" sz="900">
+                <a:solidFill>
+                  <a:srgbClr val="9AA7B6"/>
+                </a:solidFill>
+                <a:latin typeface="Poppins"/>
+              </a:rPr>
+              <a:t>Université de Mostaganem — Dr. Madani BELACEL</a:t>
             </a:r>
           </a:p>
         </p:txBody>
@@ -7844,9 +8066,7 @@
   <p:cSld>
     <p:bg>
       <p:bgPr>
-        <a:solidFill>
-          <a:srgbClr val="0B3D2E"/>
-        </a:solidFill>
+        <a:solidFill>val="004A38"/&gt;</a:solidFill>
         <a:effectLst/>
       </p:bgPr>
     </p:bg>
@@ -7871,9 +8091,7 @@
           <a:prstGeom prst="rect">
             <a:avLst/>
           </a:prstGeom>
-          <a:solidFill>
-            <a:srgbClr val="146B4A"/>
-          </a:solidFill>
+          <a:solidFill>val="007A55"/&gt;</a:solidFill>
           <a:ln>
             <a:noFill/>
           </a:ln>
@@ -7915,9 +8133,7 @@
           <a:prstGeom prst="rect">
             <a:avLst/>
           </a:prstGeom>
-          <a:solidFill>
-            <a:srgbClr val="FFD700"/>
-          </a:solidFill>
+          <a:solidFill>val="F0B429"/&gt;</a:solidFill>
           <a:ln>
             <a:noFill/>
           </a:ln>
@@ -7959,9 +8175,7 @@
           <a:prstGeom prst="rect">
             <a:avLst/>
           </a:prstGeom>
-          <a:solidFill>
-            <a:srgbClr val="FFD700"/>
-          </a:solidFill>
+          <a:solidFill>val="F0B429"/&gt;</a:solidFill>
           <a:ln>
             <a:noFill/>
           </a:ln>
@@ -8003,9 +8217,7 @@
           <a:prstGeom prst="rect">
             <a:avLst/>
           </a:prstGeom>
-          <a:solidFill>
-            <a:srgbClr val="146B4A"/>
-          </a:solidFill>
+          <a:solidFill>val="007A55"/&gt;</a:solidFill>
           <a:ln>
             <a:noFill/>
           </a:ln>
@@ -8058,10 +8270,8 @@
             <a:pPr algn="l"/>
             <a:r>
               <a:rPr sz="3000" b="1" i="0">
-                <a:solidFill>
-                  <a:srgbClr val="FFD700"/>
-                </a:solidFill>
-                <a:latin typeface="Calibri"/>
+                <a:solidFill>val="F0B429"/&gt;</a:solidFill>
+                <a:latin typeface="Poppins"/>
               </a:rPr>
               <a:t>Références</a:t>
             </a:r>
@@ -8082,9 +8292,7 @@
           <a:prstGeom prst="rect">
             <a:avLst/>
           </a:prstGeom>
-          <a:solidFill>
-            <a:srgbClr val="146B4A"/>
-          </a:solidFill>
+          <a:solidFill>val="007A55"/&gt;</a:solidFill>
           <a:ln>
             <a:noFill/>
           </a:ln>
@@ -8141,10 +8349,8 @@
             </a:pPr>
             <a:r>
               <a:rPr sz="1500">
-                <a:solidFill>
-                  <a:srgbClr val="BBBBBB"/>
-                </a:solidFill>
-                <a:latin typeface="Calibri"/>
+                <a:solidFill>val="9AA7B6"/&gt;</a:solidFill>
+                <a:latin typeface="Poppins"/>
               </a:rPr>
               <a:t>- A. Tanenbaum, « Réseaux », Pearson Education.</a:t>
             </a:r>
@@ -8157,10 +8363,8 @@
             </a:pPr>
             <a:r>
               <a:rPr sz="1500">
-                <a:solidFill>
-                  <a:srgbClr val="BBBBBB"/>
-                </a:solidFill>
-                <a:latin typeface="Calibri"/>
+                <a:solidFill>val="9AA7B6"/&gt;</a:solidFill>
+                <a:latin typeface="Poppins"/>
               </a:rPr>
               <a:t>- J.-F. Pillou, « Réseaux TCP/IP », Dunod.</a:t>
             </a:r>
@@ -8173,10 +8377,8 @@
             </a:pPr>
             <a:r>
               <a:rPr sz="1500">
-                <a:solidFill>
-                  <a:srgbClr val="BBBBBB"/>
-                </a:solidFill>
-                <a:latin typeface="Calibri"/>
+                <a:solidFill>val="9AA7B6"/&gt;</a:solidFill>
+                <a:latin typeface="Poppins"/>
               </a:rPr>
               <a:t>- Supports de cours Module TIC, Université de Mostaganem.</a:t>
             </a:r>
@@ -8189,10 +8391,8 @@
             </a:pPr>
             <a:r>
               <a:rPr sz="1500">
-                <a:solidFill>
-                  <a:srgbClr val="BBBBBB"/>
-                </a:solidFill>
-                <a:latin typeface="Calibri"/>
+                <a:solidFill>val="9AA7B6"/&gt;</a:solidFill>
+                <a:latin typeface="Poppins"/>
               </a:rPr>
               <a:t>- www.cisco.com - ressources CCNA.</a:t>
             </a:r>
@@ -8223,6 +8423,47 @@
           </a:prstGeom>
         </p:spPr>
       </p:pic>
+      <p:sp>
+        <p:nvSpPr>
+          <p:cNvPr id="990001" name="Pied de page FLE"/>
+          <p:cNvSpPr>
+            <a:spLocks noGrp="1"/>
+          </p:cNvSpPr>
+          <p:nvPr/>
+        </p:nvSpPr>
+        <p:spPr>
+          <a:xfrm>
+            <a:off x="4343400" y="-329184"/>
+            <a:ext cx="4572000" cy="274320"/>
+          </a:xfrm>
+          <a:prstGeom prst="rect">
+            <a:avLst/>
+          </a:prstGeom>
+        </p:spPr>
+        <p:txBody>
+          <a:bodyPr anchor="b"/>
+          <a:lstStyle/>
+          <a:p>
+            <a:pPr algn="r">
+              <a:defRPr sz="900">
+                <a:solidFill>
+                  <a:srgbClr val="9AA7B6"/>
+                </a:solidFill>
+                <a:latin typeface="Poppins"/>
+              </a:defRPr>
+            </a:pPr>
+            <a:r>
+              <a:rPr lang="fr-FR" sz="900">
+                <a:solidFill>
+                  <a:srgbClr val="9AA7B6"/>
+                </a:solidFill>
+                <a:latin typeface="Poppins"/>
+              </a:rPr>
+              <a:t>Université de Mostaganem — Dr. Madani BELACEL</a:t>
+            </a:r>
+          </a:p>
+        </p:txBody>
+      </p:sp>
     </p:spTree>
   </p:cSld>
   <p:clrMapOvr>
@@ -8236,9 +8477,7 @@
   <p:cSld>
     <p:bg>
       <p:bgPr>
-        <a:solidFill>
-          <a:srgbClr val="0B3D2E"/>
-        </a:solidFill>
+        <a:solidFill>val="004A38"/&gt;</a:solidFill>
         <a:effectLst/>
       </p:bgPr>
     </p:bg>
@@ -8263,9 +8502,7 @@
           <a:prstGeom prst="rect">
             <a:avLst/>
           </a:prstGeom>
-          <a:solidFill>
-            <a:srgbClr val="146B4A"/>
-          </a:solidFill>
+          <a:solidFill>val="007A55"/&gt;</a:solidFill>
           <a:ln>
             <a:noFill/>
           </a:ln>
@@ -8307,9 +8544,7 @@
           <a:prstGeom prst="rect">
             <a:avLst/>
           </a:prstGeom>
-          <a:solidFill>
-            <a:srgbClr val="FFD700"/>
-          </a:solidFill>
+          <a:solidFill>val="F0B429"/&gt;</a:solidFill>
           <a:ln>
             <a:noFill/>
           </a:ln>
@@ -8351,9 +8586,7 @@
           <a:prstGeom prst="rect">
             <a:avLst/>
           </a:prstGeom>
-          <a:solidFill>
-            <a:srgbClr val="FFD700"/>
-          </a:solidFill>
+          <a:solidFill>val="F0B429"/&gt;</a:solidFill>
           <a:ln>
             <a:noFill/>
           </a:ln>
@@ -8395,9 +8628,7 @@
           <a:prstGeom prst="rect">
             <a:avLst/>
           </a:prstGeom>
-          <a:solidFill>
-            <a:srgbClr val="146B4A"/>
-          </a:solidFill>
+          <a:solidFill>val="007A55"/&gt;</a:solidFill>
           <a:ln>
             <a:noFill/>
           </a:ln>
@@ -8439,9 +8670,7 @@
           <a:prstGeom prst="rect">
             <a:avLst/>
           </a:prstGeom>
-          <a:solidFill>
-            <a:srgbClr val="FFD700"/>
-          </a:solidFill>
+          <a:solidFill>val="F0B429"/&gt;</a:solidFill>
           <a:ln>
             <a:noFill/>
           </a:ln>
@@ -8494,10 +8723,8 @@
             <a:pPr algn="ctr"/>
             <a:r>
               <a:rPr sz="3800" b="1" i="0">
-                <a:solidFill>
-                  <a:srgbClr val="FFD700"/>
-                </a:solidFill>
-                <a:latin typeface="Calibri"/>
+                <a:solidFill>val="F0B429"/&gt;</a:solidFill>
+                <a:latin typeface="Poppins"/>
               </a:rPr>
               <a:t>Merci de votre attention !</a:t>
             </a:r>
@@ -8529,10 +8756,8 @@
             <a:pPr algn="ctr"/>
             <a:r>
               <a:rPr sz="2600" b="0" i="0">
-                <a:solidFill>
-                  <a:srgbClr val="FFFFFF"/>
-                </a:solidFill>
-                <a:latin typeface="Calibri"/>
+                <a:solidFill>val="FFFFFF"/&gt;</a:solidFill>
+                <a:latin typeface="Poppins"/>
               </a:rPr>
               <a:t>Des questions ?</a:t>
             </a:r>
@@ -8564,10 +8789,8 @@
             <a:pPr algn="ctr"/>
             <a:r>
               <a:rPr sz="1600" b="0" i="0">
-                <a:solidFill>
-                  <a:srgbClr val="BBBBBB"/>
-                </a:solidFill>
-                <a:latin typeface="Calibri"/>
+                <a:solidFill>val="9AA7B6"/&gt;</a:solidFill>
+                <a:latin typeface="Poppins"/>
               </a:rPr>
               <a:t>Dr. BELACEL Madani</a:t>
             </a:r>
@@ -8598,6 +8821,47 @@
           </a:prstGeom>
         </p:spPr>
       </p:pic>
+      <p:sp>
+        <p:nvSpPr>
+          <p:cNvPr id="990001" name="Pied de page FLE"/>
+          <p:cNvSpPr>
+            <a:spLocks noGrp="1"/>
+          </p:cNvSpPr>
+          <p:nvPr/>
+        </p:nvSpPr>
+        <p:spPr>
+          <a:xfrm>
+            <a:off x="4343400" y="-329184"/>
+            <a:ext cx="4572000" cy="274320"/>
+          </a:xfrm>
+          <a:prstGeom prst="rect">
+            <a:avLst/>
+          </a:prstGeom>
+        </p:spPr>
+        <p:txBody>
+          <a:bodyPr anchor="b"/>
+          <a:lstStyle/>
+          <a:p>
+            <a:pPr algn="r">
+              <a:defRPr sz="900">
+                <a:solidFill>
+                  <a:srgbClr val="9AA7B6"/>
+                </a:solidFill>
+                <a:latin typeface="Poppins"/>
+              </a:defRPr>
+            </a:pPr>
+            <a:r>
+              <a:rPr lang="fr-FR" sz="900">
+                <a:solidFill>
+                  <a:srgbClr val="9AA7B6"/>
+                </a:solidFill>
+                <a:latin typeface="Poppins"/>
+              </a:rPr>
+              <a:t>Université de Mostaganem — Dr. Madani BELACEL</a:t>
+            </a:r>
+          </a:p>
+        </p:txBody>
+      </p:sp>
     </p:spTree>
   </p:cSld>
   <p:clrMapOvr>
@@ -8611,9 +8875,7 @@
   <p:cSld>
     <p:bg>
       <p:bgPr>
-        <a:solidFill>
-          <a:srgbClr val="0B3D2E"/>
-        </a:solidFill>
+        <a:solidFill>val="004A38"/&gt;</a:solidFill>
         <a:effectLst/>
       </p:bgPr>
     </p:bg>
@@ -8638,9 +8900,7 @@
           <a:prstGeom prst="rect">
             <a:avLst/>
           </a:prstGeom>
-          <a:solidFill>
-            <a:srgbClr val="146B4A"/>
-          </a:solidFill>
+          <a:solidFill>val="007A55"/&gt;</a:solidFill>
           <a:ln>
             <a:noFill/>
           </a:ln>
@@ -8682,9 +8942,7 @@
           <a:prstGeom prst="rect">
             <a:avLst/>
           </a:prstGeom>
-          <a:solidFill>
-            <a:srgbClr val="FFD700"/>
-          </a:solidFill>
+          <a:solidFill>val="F0B429"/&gt;</a:solidFill>
           <a:ln>
             <a:noFill/>
           </a:ln>
@@ -8726,9 +8984,7 @@
           <a:prstGeom prst="rect">
             <a:avLst/>
           </a:prstGeom>
-          <a:solidFill>
-            <a:srgbClr val="FFD700"/>
-          </a:solidFill>
+          <a:solidFill>val="F0B429"/&gt;</a:solidFill>
           <a:ln>
             <a:noFill/>
           </a:ln>
@@ -8770,9 +9026,7 @@
           <a:prstGeom prst="rect">
             <a:avLst/>
           </a:prstGeom>
-          <a:solidFill>
-            <a:srgbClr val="146B4A"/>
-          </a:solidFill>
+          <a:solidFill>val="007A55"/&gt;</a:solidFill>
           <a:ln>
             <a:noFill/>
           </a:ln>
@@ -8814,9 +9068,7 @@
           <a:prstGeom prst="rect">
             <a:avLst/>
           </a:prstGeom>
-          <a:solidFill>
-            <a:srgbClr val="146B4A"/>
-          </a:solidFill>
+          <a:solidFill>val="007A55"/&gt;</a:solidFill>
           <a:ln>
             <a:noFill/>
           </a:ln>
@@ -8869,10 +9121,8 @@
             <a:pPr algn="ctr"/>
             <a:r>
               <a:rPr sz="2200" b="1" i="0">
-                <a:solidFill>
-                  <a:srgbClr val="BBBBBB"/>
-                </a:solidFill>
-                <a:latin typeface="Calibri"/>
+                <a:solidFill>val="9AA7B6"/&gt;</a:solidFill>
+                <a:latin typeface="Poppins"/>
               </a:rPr>
               <a:t>Section 1</a:t>
             </a:r>
@@ -8904,10 +9154,8 @@
             <a:pPr algn="ctr"/>
             <a:r>
               <a:rPr sz="2800" b="1" i="0">
-                <a:solidFill>
-                  <a:srgbClr val="FFD700"/>
-                </a:solidFill>
-                <a:latin typeface="Calibri"/>
+                <a:solidFill>val="F0B429"/&gt;</a:solidFill>
+                <a:latin typeface="Poppins"/>
               </a:rPr>
               <a:t>Qu'est-ce qu'un réseau ?</a:t>
             </a:r>
@@ -8938,6 +9186,47 @@
           </a:prstGeom>
         </p:spPr>
       </p:pic>
+      <p:sp>
+        <p:nvSpPr>
+          <p:cNvPr id="990001" name="Pied de page FLE"/>
+          <p:cNvSpPr>
+            <a:spLocks noGrp="1"/>
+          </p:cNvSpPr>
+          <p:nvPr/>
+        </p:nvSpPr>
+        <p:spPr>
+          <a:xfrm>
+            <a:off x="4343400" y="-329184"/>
+            <a:ext cx="4572000" cy="274320"/>
+          </a:xfrm>
+          <a:prstGeom prst="rect">
+            <a:avLst/>
+          </a:prstGeom>
+        </p:spPr>
+        <p:txBody>
+          <a:bodyPr anchor="b"/>
+          <a:lstStyle/>
+          <a:p>
+            <a:pPr algn="r">
+              <a:defRPr sz="900">
+                <a:solidFill>
+                  <a:srgbClr val="9AA7B6"/>
+                </a:solidFill>
+                <a:latin typeface="Poppins"/>
+              </a:defRPr>
+            </a:pPr>
+            <a:r>
+              <a:rPr lang="fr-FR" sz="900">
+                <a:solidFill>
+                  <a:srgbClr val="9AA7B6"/>
+                </a:solidFill>
+                <a:latin typeface="Poppins"/>
+              </a:rPr>
+              <a:t>Université de Mostaganem — Dr. Madani BELACEL</a:t>
+            </a:r>
+          </a:p>
+        </p:txBody>
+      </p:sp>
     </p:spTree>
   </p:cSld>
   <p:clrMapOvr>
@@ -8951,9 +9240,7 @@
   <p:cSld>
     <p:bg>
       <p:bgPr>
-        <a:solidFill>
-          <a:srgbClr val="0B3D2E"/>
-        </a:solidFill>
+        <a:solidFill>val="004A38"/&gt;</a:solidFill>
         <a:effectLst/>
       </p:bgPr>
     </p:bg>
@@ -8978,9 +9265,7 @@
           <a:prstGeom prst="rect">
             <a:avLst/>
           </a:prstGeom>
-          <a:solidFill>
-            <a:srgbClr val="146B4A"/>
-          </a:solidFill>
+          <a:solidFill>val="007A55"/&gt;</a:solidFill>
           <a:ln>
             <a:noFill/>
           </a:ln>
@@ -9022,9 +9307,7 @@
           <a:prstGeom prst="rect">
             <a:avLst/>
           </a:prstGeom>
-          <a:solidFill>
-            <a:srgbClr val="FFD700"/>
-          </a:solidFill>
+          <a:solidFill>val="F0B429"/&gt;</a:solidFill>
           <a:ln>
             <a:noFill/>
           </a:ln>
@@ -9066,9 +9349,7 @@
           <a:prstGeom prst="rect">
             <a:avLst/>
           </a:prstGeom>
-          <a:solidFill>
-            <a:srgbClr val="FFD700"/>
-          </a:solidFill>
+          <a:solidFill>val="F0B429"/&gt;</a:solidFill>
           <a:ln>
             <a:noFill/>
           </a:ln>
@@ -9110,9 +9391,7 @@
           <a:prstGeom prst="rect">
             <a:avLst/>
           </a:prstGeom>
-          <a:solidFill>
-            <a:srgbClr val="146B4A"/>
-          </a:solidFill>
+          <a:solidFill>val="007A55"/&gt;</a:solidFill>
           <a:ln>
             <a:noFill/>
           </a:ln>
@@ -9165,10 +9444,8 @@
             <a:pPr algn="l"/>
             <a:r>
               <a:rPr sz="2400" b="1" i="0">
-                <a:solidFill>
-                  <a:srgbClr val="FFD700"/>
-                </a:solidFill>
-                <a:latin typeface="Calibri"/>
+                <a:solidFill>val="F0B429"/&gt;</a:solidFill>
+                <a:latin typeface="Poppins"/>
               </a:rPr>
               <a:t>1 - Qu'est-ce qu'un réseau ?</a:t>
             </a:r>
@@ -9189,9 +9466,7 @@
           <a:prstGeom prst="rect">
             <a:avLst/>
           </a:prstGeom>
-          <a:solidFill>
-            <a:srgbClr val="146B4A"/>
-          </a:solidFill>
+          <a:solidFill>val="007A55"/&gt;</a:solidFill>
           <a:ln>
             <a:noFill/>
           </a:ln>
@@ -9248,10 +9523,8 @@
             </a:pPr>
             <a:r>
               <a:rPr sz="1800">
-                <a:solidFill>
-                  <a:srgbClr val="FFFFFF"/>
-                </a:solidFill>
-                <a:latin typeface="Calibri"/>
+                <a:solidFill>val="FFFFFF"/&gt;</a:solidFill>
+                <a:latin typeface="Poppins"/>
               </a:rPr>
               <a:t>▪  Ensemble d'équipements interconnectés échangeant des données.</a:t>
             </a:r>
@@ -9264,10 +9537,8 @@
             </a:pPr>
             <a:r>
               <a:rPr sz="1800">
-                <a:solidFill>
-                  <a:srgbClr val="FFFFFF"/>
-                </a:solidFill>
-                <a:latin typeface="Calibri"/>
+                <a:solidFill>val="FFFFFF"/&gt;</a:solidFill>
+                <a:latin typeface="Poppins"/>
               </a:rPr>
               <a:t>▪  Objectifs : partage de ressources, fichiers, imprimantes, Internet.</a:t>
             </a:r>
@@ -9280,10 +9551,8 @@
             </a:pPr>
             <a:r>
               <a:rPr sz="1800">
-                <a:solidFill>
-                  <a:srgbClr val="FFFFFF"/>
-                </a:solidFill>
-                <a:latin typeface="Calibri"/>
+                <a:solidFill>val="FFFFFF"/&gt;</a:solidFill>
+                <a:latin typeface="Poppins"/>
               </a:rPr>
               <a:t>▪  Communication : supports filaires (cuivre, fibre) ou sans fil.</a:t>
             </a:r>
@@ -9296,10 +9565,8 @@
             </a:pPr>
             <a:r>
               <a:rPr sz="1800">
-                <a:solidFill>
-                  <a:srgbClr val="FFFFFF"/>
-                </a:solidFill>
-                <a:latin typeface="Calibri"/>
+                <a:solidFill>val="FFFFFF"/&gt;</a:solidFill>
+                <a:latin typeface="Poppins"/>
               </a:rPr>
               <a:t>▪  Équipements : cartes réseau, switchs, routeurs, points d'accès.</a:t>
             </a:r>
@@ -9330,6 +9597,47 @@
           </a:prstGeom>
         </p:spPr>
       </p:pic>
+      <p:sp>
+        <p:nvSpPr>
+          <p:cNvPr id="990001" name="Pied de page FLE"/>
+          <p:cNvSpPr>
+            <a:spLocks noGrp="1"/>
+          </p:cNvSpPr>
+          <p:nvPr/>
+        </p:nvSpPr>
+        <p:spPr>
+          <a:xfrm>
+            <a:off x="4343400" y="-329184"/>
+            <a:ext cx="4572000" cy="274320"/>
+          </a:xfrm>
+          <a:prstGeom prst="rect">
+            <a:avLst/>
+          </a:prstGeom>
+        </p:spPr>
+        <p:txBody>
+          <a:bodyPr anchor="b"/>
+          <a:lstStyle/>
+          <a:p>
+            <a:pPr algn="r">
+              <a:defRPr sz="900">
+                <a:solidFill>
+                  <a:srgbClr val="9AA7B6"/>
+                </a:solidFill>
+                <a:latin typeface="Poppins"/>
+              </a:defRPr>
+            </a:pPr>
+            <a:r>
+              <a:rPr lang="fr-FR" sz="900">
+                <a:solidFill>
+                  <a:srgbClr val="9AA7B6"/>
+                </a:solidFill>
+                <a:latin typeface="Poppins"/>
+              </a:rPr>
+              <a:t>Université de Mostaganem — Dr. Madani BELACEL</a:t>
+            </a:r>
+          </a:p>
+        </p:txBody>
+      </p:sp>
     </p:spTree>
   </p:cSld>
   <p:clrMapOvr>
@@ -9343,9 +9651,7 @@
   <p:cSld>
     <p:bg>
       <p:bgPr>
-        <a:solidFill>
-          <a:srgbClr val="0B3D2E"/>
-        </a:solidFill>
+        <a:solidFill>val="004A38"/&gt;</a:solidFill>
         <a:effectLst/>
       </p:bgPr>
     </p:bg>
@@ -9370,9 +9676,7 @@
           <a:prstGeom prst="rect">
             <a:avLst/>
           </a:prstGeom>
-          <a:solidFill>
-            <a:srgbClr val="146B4A"/>
-          </a:solidFill>
+          <a:solidFill>val="007A55"/&gt;</a:solidFill>
           <a:ln>
             <a:noFill/>
           </a:ln>
@@ -9414,9 +9718,7 @@
           <a:prstGeom prst="rect">
             <a:avLst/>
           </a:prstGeom>
-          <a:solidFill>
-            <a:srgbClr val="FFD700"/>
-          </a:solidFill>
+          <a:solidFill>val="F0B429"/&gt;</a:solidFill>
           <a:ln>
             <a:noFill/>
           </a:ln>
@@ -9458,9 +9760,7 @@
           <a:prstGeom prst="rect">
             <a:avLst/>
           </a:prstGeom>
-          <a:solidFill>
-            <a:srgbClr val="FFD700"/>
-          </a:solidFill>
+          <a:solidFill>val="F0B429"/&gt;</a:solidFill>
           <a:ln>
             <a:noFill/>
           </a:ln>
@@ -9502,9 +9802,7 @@
           <a:prstGeom prst="rect">
             <a:avLst/>
           </a:prstGeom>
-          <a:solidFill>
-            <a:srgbClr val="146B4A"/>
-          </a:solidFill>
+          <a:solidFill>val="007A55"/&gt;</a:solidFill>
           <a:ln>
             <a:noFill/>
           </a:ln>
@@ -9546,9 +9844,7 @@
           <a:prstGeom prst="rect">
             <a:avLst/>
           </a:prstGeom>
-          <a:solidFill>
-            <a:srgbClr val="146B4A"/>
-          </a:solidFill>
+          <a:solidFill>val="007A55"/&gt;</a:solidFill>
           <a:ln>
             <a:noFill/>
           </a:ln>
@@ -9601,10 +9897,8 @@
             <a:pPr algn="ctr"/>
             <a:r>
               <a:rPr sz="2200" b="1" i="0">
-                <a:solidFill>
-                  <a:srgbClr val="BBBBBB"/>
-                </a:solidFill>
-                <a:latin typeface="Calibri"/>
+                <a:solidFill>val="9AA7B6"/&gt;</a:solidFill>
+                <a:latin typeface="Poppins"/>
               </a:rPr>
               <a:t>Section 2</a:t>
             </a:r>
@@ -9636,10 +9930,8 @@
             <a:pPr algn="ctr"/>
             <a:r>
               <a:rPr sz="2800" b="1" i="0">
-                <a:solidFill>
-                  <a:srgbClr val="FFD700"/>
-                </a:solidFill>
-                <a:latin typeface="Calibri"/>
+                <a:solidFill>val="F0B429"/&gt;</a:solidFill>
+                <a:latin typeface="Poppins"/>
               </a:rPr>
               <a:t>Types de réseaux</a:t>
             </a:r>
@@ -9670,6 +9962,47 @@
           </a:prstGeom>
         </p:spPr>
       </p:pic>
+      <p:sp>
+        <p:nvSpPr>
+          <p:cNvPr id="990001" name="Pied de page FLE"/>
+          <p:cNvSpPr>
+            <a:spLocks noGrp="1"/>
+          </p:cNvSpPr>
+          <p:nvPr/>
+        </p:nvSpPr>
+        <p:spPr>
+          <a:xfrm>
+            <a:off x="4343400" y="-329184"/>
+            <a:ext cx="4572000" cy="274320"/>
+          </a:xfrm>
+          <a:prstGeom prst="rect">
+            <a:avLst/>
+          </a:prstGeom>
+        </p:spPr>
+        <p:txBody>
+          <a:bodyPr anchor="b"/>
+          <a:lstStyle/>
+          <a:p>
+            <a:pPr algn="r">
+              <a:defRPr sz="900">
+                <a:solidFill>
+                  <a:srgbClr val="9AA7B6"/>
+                </a:solidFill>
+                <a:latin typeface="Poppins"/>
+              </a:defRPr>
+            </a:pPr>
+            <a:r>
+              <a:rPr lang="fr-FR" sz="900">
+                <a:solidFill>
+                  <a:srgbClr val="9AA7B6"/>
+                </a:solidFill>
+                <a:latin typeface="Poppins"/>
+              </a:rPr>
+              <a:t>Université de Mostaganem — Dr. Madani BELACEL</a:t>
+            </a:r>
+          </a:p>
+        </p:txBody>
+      </p:sp>
     </p:spTree>
   </p:cSld>
   <p:clrMapOvr>
@@ -9683,9 +10016,7 @@
   <p:cSld>
     <p:bg>
       <p:bgPr>
-        <a:solidFill>
-          <a:srgbClr val="0B3D2E"/>
-        </a:solidFill>
+        <a:solidFill>val="004A38"/&gt;</a:solidFill>
         <a:effectLst/>
       </p:bgPr>
     </p:bg>
@@ -9710,9 +10041,7 @@
           <a:prstGeom prst="rect">
             <a:avLst/>
           </a:prstGeom>
-          <a:solidFill>
-            <a:srgbClr val="146B4A"/>
-          </a:solidFill>
+          <a:solidFill>val="007A55"/&gt;</a:solidFill>
           <a:ln>
             <a:noFill/>
           </a:ln>
@@ -9754,9 +10083,7 @@
           <a:prstGeom prst="rect">
             <a:avLst/>
           </a:prstGeom>
-          <a:solidFill>
-            <a:srgbClr val="FFD700"/>
-          </a:solidFill>
+          <a:solidFill>val="F0B429"/&gt;</a:solidFill>
           <a:ln>
             <a:noFill/>
           </a:ln>
@@ -9798,9 +10125,7 @@
           <a:prstGeom prst="rect">
             <a:avLst/>
           </a:prstGeom>
-          <a:solidFill>
-            <a:srgbClr val="FFD700"/>
-          </a:solidFill>
+          <a:solidFill>val="F0B429"/&gt;</a:solidFill>
           <a:ln>
             <a:noFill/>
           </a:ln>
@@ -9842,9 +10167,7 @@
           <a:prstGeom prst="rect">
             <a:avLst/>
           </a:prstGeom>
-          <a:solidFill>
-            <a:srgbClr val="146B4A"/>
-          </a:solidFill>
+          <a:solidFill>val="007A55"/&gt;</a:solidFill>
           <a:ln>
             <a:noFill/>
           </a:ln>
@@ -9897,10 +10220,8 @@
             <a:pPr algn="l"/>
             <a:r>
               <a:rPr sz="2400" b="1" i="0">
-                <a:solidFill>
-                  <a:srgbClr val="FFD700"/>
-                </a:solidFill>
-                <a:latin typeface="Calibri"/>
+                <a:solidFill>val="F0B429"/&gt;</a:solidFill>
+                <a:latin typeface="Poppins"/>
               </a:rPr>
               <a:t>2 - Types de réseaux</a:t>
             </a:r>
@@ -9921,9 +10242,7 @@
           <a:prstGeom prst="rect">
             <a:avLst/>
           </a:prstGeom>
-          <a:solidFill>
-            <a:srgbClr val="146B4A"/>
-          </a:solidFill>
+          <a:solidFill>val="007A55"/&gt;</a:solidFill>
           <a:ln>
             <a:noFill/>
           </a:ln>
@@ -9980,10 +10299,8 @@
             </a:pPr>
             <a:r>
               <a:rPr sz="1800">
-                <a:solidFill>
-                  <a:srgbClr val="FFFFFF"/>
-                </a:solidFill>
-                <a:latin typeface="Calibri"/>
+                <a:solidFill>val="FFFFFF"/&gt;</a:solidFill>
+                <a:latin typeface="Poppins"/>
               </a:rPr>
               <a:t>▪  PAN : réseau personnel (Bluetooth), quelques mètres.</a:t>
             </a:r>
@@ -9996,10 +10313,8 @@
             </a:pPr>
             <a:r>
               <a:rPr sz="1800">
-                <a:solidFill>
-                  <a:srgbClr val="FFFFFF"/>
-                </a:solidFill>
-                <a:latin typeface="Calibri"/>
+                <a:solidFill>val="FFFFFF"/&gt;</a:solidFill>
+                <a:latin typeface="Poppins"/>
               </a:rPr>
               <a:t>▪  LAN : réseau local (domicile, laboratoire, entreprise).</a:t>
             </a:r>
@@ -10012,10 +10327,8 @@
             </a:pPr>
             <a:r>
               <a:rPr sz="1800">
-                <a:solidFill>
-                  <a:srgbClr val="FFFFFF"/>
-                </a:solidFill>
-                <a:latin typeface="Calibri"/>
+                <a:solidFill>val="FFFFFF"/&gt;</a:solidFill>
+                <a:latin typeface="Poppins"/>
               </a:rPr>
               <a:t>▪  MAN : réseau métropolitain (ville).</a:t>
             </a:r>
@@ -10028,10 +10341,8 @@
             </a:pPr>
             <a:r>
               <a:rPr sz="1800">
-                <a:solidFill>
-                  <a:srgbClr val="FFFFFF"/>
-                </a:solidFill>
-                <a:latin typeface="Calibri"/>
+                <a:solidFill>val="FFFFFF"/&gt;</a:solidFill>
+                <a:latin typeface="Poppins"/>
               </a:rPr>
               <a:t>▪  WAN : réseau étendu (Internet relie des millions de LAN).</a:t>
             </a:r>
@@ -10062,6 +10373,47 @@
           </a:prstGeom>
         </p:spPr>
       </p:pic>
+      <p:sp>
+        <p:nvSpPr>
+          <p:cNvPr id="990001" name="Pied de page FLE"/>
+          <p:cNvSpPr>
+            <a:spLocks noGrp="1"/>
+          </p:cNvSpPr>
+          <p:nvPr/>
+        </p:nvSpPr>
+        <p:spPr>
+          <a:xfrm>
+            <a:off x="4343400" y="-329184"/>
+            <a:ext cx="4572000" cy="274320"/>
+          </a:xfrm>
+          <a:prstGeom prst="rect">
+            <a:avLst/>
+          </a:prstGeom>
+        </p:spPr>
+        <p:txBody>
+          <a:bodyPr anchor="b"/>
+          <a:lstStyle/>
+          <a:p>
+            <a:pPr algn="r">
+              <a:defRPr sz="900">
+                <a:solidFill>
+                  <a:srgbClr val="9AA7B6"/>
+                </a:solidFill>
+                <a:latin typeface="Poppins"/>
+              </a:defRPr>
+            </a:pPr>
+            <a:r>
+              <a:rPr lang="fr-FR" sz="900">
+                <a:solidFill>
+                  <a:srgbClr val="9AA7B6"/>
+                </a:solidFill>
+                <a:latin typeface="Poppins"/>
+              </a:rPr>
+              <a:t>Université de Mostaganem — Dr. Madani BELACEL</a:t>
+            </a:r>
+          </a:p>
+        </p:txBody>
+      </p:sp>
     </p:spTree>
   </p:cSld>
   <p:clrMapOvr>
@@ -10075,9 +10427,7 @@
   <p:cSld>
     <p:bg>
       <p:bgPr>
-        <a:solidFill>
-          <a:srgbClr val="0B3D2E"/>
-        </a:solidFill>
+        <a:solidFill>val="004A38"/&gt;</a:solidFill>
         <a:effectLst/>
       </p:bgPr>
     </p:bg>
@@ -10102,9 +10452,7 @@
           <a:prstGeom prst="rect">
             <a:avLst/>
           </a:prstGeom>
-          <a:solidFill>
-            <a:srgbClr val="146B4A"/>
-          </a:solidFill>
+          <a:solidFill>val="007A55"/&gt;</a:solidFill>
           <a:ln>
             <a:noFill/>
           </a:ln>
@@ -10146,9 +10494,7 @@
           <a:prstGeom prst="rect">
             <a:avLst/>
           </a:prstGeom>
-          <a:solidFill>
-            <a:srgbClr val="FFD700"/>
-          </a:solidFill>
+          <a:solidFill>val="F0B429"/&gt;</a:solidFill>
           <a:ln>
             <a:noFill/>
           </a:ln>
@@ -10190,9 +10536,7 @@
           <a:prstGeom prst="rect">
             <a:avLst/>
           </a:prstGeom>
-          <a:solidFill>
-            <a:srgbClr val="FFD700"/>
-          </a:solidFill>
+          <a:solidFill>val="F0B429"/&gt;</a:solidFill>
           <a:ln>
             <a:noFill/>
           </a:ln>
@@ -10234,9 +10578,7 @@
           <a:prstGeom prst="rect">
             <a:avLst/>
           </a:prstGeom>
-          <a:solidFill>
-            <a:srgbClr val="146B4A"/>
-          </a:solidFill>
+          <a:solidFill>val="007A55"/&gt;</a:solidFill>
           <a:ln>
             <a:noFill/>
           </a:ln>
@@ -10278,9 +10620,7 @@
           <a:prstGeom prst="rect">
             <a:avLst/>
           </a:prstGeom>
-          <a:solidFill>
-            <a:srgbClr val="146B4A"/>
-          </a:solidFill>
+          <a:solidFill>val="007A55"/&gt;</a:solidFill>
           <a:ln>
             <a:noFill/>
           </a:ln>
@@ -10333,10 +10673,8 @@
             <a:pPr algn="ctr"/>
             <a:r>
               <a:rPr sz="2200" b="1" i="0">
-                <a:solidFill>
-                  <a:srgbClr val="BBBBBB"/>
-                </a:solidFill>
-                <a:latin typeface="Calibri"/>
+                <a:solidFill>val="9AA7B6"/&gt;</a:solidFill>
+                <a:latin typeface="Poppins"/>
               </a:rPr>
               <a:t>Section 3</a:t>
             </a:r>
@@ -10368,10 +10706,8 @@
             <a:pPr algn="ctr"/>
             <a:r>
               <a:rPr sz="2800" b="1" i="0">
-                <a:solidFill>
-                  <a:srgbClr val="FFD700"/>
-                </a:solidFill>
-                <a:latin typeface="Calibri"/>
+                <a:solidFill>val="F0B429"/&gt;</a:solidFill>
+                <a:latin typeface="Poppins"/>
               </a:rPr>
               <a:t>Topologies de réseaux</a:t>
             </a:r>
@@ -10402,6 +10738,47 @@
           </a:prstGeom>
         </p:spPr>
       </p:pic>
+      <p:sp>
+        <p:nvSpPr>
+          <p:cNvPr id="990001" name="Pied de page FLE"/>
+          <p:cNvSpPr>
+            <a:spLocks noGrp="1"/>
+          </p:cNvSpPr>
+          <p:nvPr/>
+        </p:nvSpPr>
+        <p:spPr>
+          <a:xfrm>
+            <a:off x="4343400" y="-329184"/>
+            <a:ext cx="4572000" cy="274320"/>
+          </a:xfrm>
+          <a:prstGeom prst="rect">
+            <a:avLst/>
+          </a:prstGeom>
+        </p:spPr>
+        <p:txBody>
+          <a:bodyPr anchor="b"/>
+          <a:lstStyle/>
+          <a:p>
+            <a:pPr algn="r">
+              <a:defRPr sz="900">
+                <a:solidFill>
+                  <a:srgbClr val="9AA7B6"/>
+                </a:solidFill>
+                <a:latin typeface="Poppins"/>
+              </a:defRPr>
+            </a:pPr>
+            <a:r>
+              <a:rPr lang="fr-FR" sz="900">
+                <a:solidFill>
+                  <a:srgbClr val="9AA7B6"/>
+                </a:solidFill>
+                <a:latin typeface="Poppins"/>
+              </a:rPr>
+              <a:t>Université de Mostaganem — Dr. Madani BELACEL</a:t>
+            </a:r>
+          </a:p>
+        </p:txBody>
+      </p:sp>
     </p:spTree>
   </p:cSld>
   <p:clrMapOvr>
@@ -10415,9 +10792,7 @@
   <p:cSld>
     <p:bg>
       <p:bgPr>
-        <a:solidFill>
-          <a:srgbClr val="0B3D2E"/>
-        </a:solidFill>
+        <a:solidFill>val="004A38"/&gt;</a:solidFill>
         <a:effectLst/>
       </p:bgPr>
     </p:bg>
@@ -10442,9 +10817,7 @@
           <a:prstGeom prst="rect">
             <a:avLst/>
           </a:prstGeom>
-          <a:solidFill>
-            <a:srgbClr val="146B4A"/>
-          </a:solidFill>
+          <a:solidFill>val="007A55"/&gt;</a:solidFill>
           <a:ln>
             <a:noFill/>
           </a:ln>
@@ -10486,9 +10859,7 @@
           <a:prstGeom prst="rect">
             <a:avLst/>
           </a:prstGeom>
-          <a:solidFill>
-            <a:srgbClr val="FFD700"/>
-          </a:solidFill>
+          <a:solidFill>val="F0B429"/&gt;</a:solidFill>
           <a:ln>
             <a:noFill/>
           </a:ln>
@@ -10530,9 +10901,7 @@
           <a:prstGeom prst="rect">
             <a:avLst/>
           </a:prstGeom>
-          <a:solidFill>
-            <a:srgbClr val="FFD700"/>
-          </a:solidFill>
+          <a:solidFill>val="F0B429"/&gt;</a:solidFill>
           <a:ln>
             <a:noFill/>
           </a:ln>
@@ -10574,9 +10943,7 @@
           <a:prstGeom prst="rect">
             <a:avLst/>
           </a:prstGeom>
-          <a:solidFill>
-            <a:srgbClr val="146B4A"/>
-          </a:solidFill>
+          <a:solidFill>val="007A55"/&gt;</a:solidFill>
           <a:ln>
             <a:noFill/>
           </a:ln>
@@ -10629,10 +10996,8 @@
             <a:pPr algn="l"/>
             <a:r>
               <a:rPr sz="2400" b="1" i="0">
-                <a:solidFill>
-                  <a:srgbClr val="FFD700"/>
-                </a:solidFill>
-                <a:latin typeface="Calibri"/>
+                <a:solidFill>val="F0B429"/&gt;</a:solidFill>
+                <a:latin typeface="Poppins"/>
               </a:rPr>
               <a:t>3 - Topologies de réseaux</a:t>
             </a:r>
@@ -10653,9 +11018,7 @@
           <a:prstGeom prst="rect">
             <a:avLst/>
           </a:prstGeom>
-          <a:solidFill>
-            <a:srgbClr val="146B4A"/>
-          </a:solidFill>
+          <a:solidFill>val="007A55"/&gt;</a:solidFill>
           <a:ln>
             <a:noFill/>
           </a:ln>
@@ -10712,10 +11075,8 @@
             </a:pPr>
             <a:r>
               <a:rPr sz="1800">
-                <a:solidFill>
-                  <a:srgbClr val="FFFFFF"/>
-                </a:solidFill>
-                <a:latin typeface="Calibri"/>
+                <a:solidFill>val="FFFFFF"/&gt;</a:solidFill>
+                <a:latin typeface="Poppins"/>
               </a:rPr>
               <a:t>▪  Bus : un seul câble partagé (ancien).</a:t>
             </a:r>
@@ -10728,10 +11089,8 @@
             </a:pPr>
             <a:r>
               <a:rPr sz="1800">
-                <a:solidFill>
-                  <a:srgbClr val="FFFFFF"/>
-                </a:solidFill>
-                <a:latin typeface="Calibri"/>
+                <a:solidFill>val="FFFFFF"/&gt;</a:solidFill>
+                <a:latin typeface="Poppins"/>
               </a:rPr>
               <a:t>▪  Étoile : tout passe par un switch central (standard actuel).</a:t>
             </a:r>
@@ -10744,10 +11103,8 @@
             </a:pPr>
             <a:r>
               <a:rPr sz="1800">
-                <a:solidFill>
-                  <a:srgbClr val="FFFFFF"/>
-                </a:solidFill>
-                <a:latin typeface="Calibri"/>
+                <a:solidFill>val="FFFFFF"/&gt;</a:solidFill>
+                <a:latin typeface="Poppins"/>
               </a:rPr>
               <a:t>▪  Anneau : transmission en boucle (Token Ring).</a:t>
             </a:r>
@@ -10760,10 +11117,8 @@
             </a:pPr>
             <a:r>
               <a:rPr sz="1800">
-                <a:solidFill>
-                  <a:srgbClr val="FFFFFF"/>
-                </a:solidFill>
-                <a:latin typeface="Calibri"/>
+                <a:solidFill>val="FFFFFF"/&gt;</a:solidFill>
+                <a:latin typeface="Poppins"/>
               </a:rPr>
               <a:t>▪  Maillé : redondance maximale pour la fiabilité.</a:t>
             </a:r>
@@ -10794,6 +11149,47 @@
           </a:prstGeom>
         </p:spPr>
       </p:pic>
+      <p:sp>
+        <p:nvSpPr>
+          <p:cNvPr id="990001" name="Pied de page FLE"/>
+          <p:cNvSpPr>
+            <a:spLocks noGrp="1"/>
+          </p:cNvSpPr>
+          <p:nvPr/>
+        </p:nvSpPr>
+        <p:spPr>
+          <a:xfrm>
+            <a:off x="4343400" y="-329184"/>
+            <a:ext cx="4572000" cy="274320"/>
+          </a:xfrm>
+          <a:prstGeom prst="rect">
+            <a:avLst/>
+          </a:prstGeom>
+        </p:spPr>
+        <p:txBody>
+          <a:bodyPr anchor="b"/>
+          <a:lstStyle/>
+          <a:p>
+            <a:pPr algn="r">
+              <a:defRPr sz="900">
+                <a:solidFill>
+                  <a:srgbClr val="9AA7B6"/>
+                </a:solidFill>
+                <a:latin typeface="Poppins"/>
+              </a:defRPr>
+            </a:pPr>
+            <a:r>
+              <a:rPr lang="fr-FR" sz="900">
+                <a:solidFill>
+                  <a:srgbClr val="9AA7B6"/>
+                </a:solidFill>
+                <a:latin typeface="Poppins"/>
+              </a:rPr>
+              <a:t>Université de Mostaganem — Dr. Madani BELACEL</a:t>
+            </a:r>
+          </a:p>
+        </p:txBody>
+      </p:sp>
     </p:spTree>
   </p:cSld>
   <p:clrMapOvr>
@@ -10807,9 +11203,7 @@
   <p:cSld>
     <p:bg>
       <p:bgPr>
-        <a:solidFill>
-          <a:srgbClr val="0B3D2E"/>
-        </a:solidFill>
+        <a:solidFill>val="004A38"/&gt;</a:solidFill>
         <a:effectLst/>
       </p:bgPr>
     </p:bg>
@@ -10834,9 +11228,7 @@
           <a:prstGeom prst="rect">
             <a:avLst/>
           </a:prstGeom>
-          <a:solidFill>
-            <a:srgbClr val="146B4A"/>
-          </a:solidFill>
+          <a:solidFill>val="007A55"/&gt;</a:solidFill>
           <a:ln>
             <a:noFill/>
           </a:ln>
@@ -10878,9 +11270,7 @@
           <a:prstGeom prst="rect">
             <a:avLst/>
           </a:prstGeom>
-          <a:solidFill>
-            <a:srgbClr val="FFD700"/>
-          </a:solidFill>
+          <a:solidFill>val="F0B429"/&gt;</a:solidFill>
           <a:ln>
             <a:noFill/>
           </a:ln>
@@ -10922,9 +11312,7 @@
           <a:prstGeom prst="rect">
             <a:avLst/>
           </a:prstGeom>
-          <a:solidFill>
-            <a:srgbClr val="FFD700"/>
-          </a:solidFill>
+          <a:solidFill>val="F0B429"/&gt;</a:solidFill>
           <a:ln>
             <a:noFill/>
           </a:ln>
@@ -10966,9 +11354,7 @@
           <a:prstGeom prst="rect">
             <a:avLst/>
           </a:prstGeom>
-          <a:solidFill>
-            <a:srgbClr val="146B4A"/>
-          </a:solidFill>
+          <a:solidFill>val="007A55"/&gt;</a:solidFill>
           <a:ln>
             <a:noFill/>
           </a:ln>
@@ -11010,9 +11396,7 @@
           <a:prstGeom prst="rect">
             <a:avLst/>
           </a:prstGeom>
-          <a:solidFill>
-            <a:srgbClr val="146B4A"/>
-          </a:solidFill>
+          <a:solidFill>val="007A55"/&gt;</a:solidFill>
           <a:ln>
             <a:noFill/>
           </a:ln>
@@ -11065,10 +11449,8 @@
             <a:pPr algn="ctr"/>
             <a:r>
               <a:rPr sz="2200" b="1" i="0">
-                <a:solidFill>
-                  <a:srgbClr val="BBBBBB"/>
-                </a:solidFill>
-                <a:latin typeface="Calibri"/>
+                <a:solidFill>val="9AA7B6"/&gt;</a:solidFill>
+                <a:latin typeface="Poppins"/>
               </a:rPr>
               <a:t>Section 4</a:t>
             </a:r>
@@ -11100,10 +11482,8 @@
             <a:pPr algn="ctr"/>
             <a:r>
               <a:rPr sz="2800" b="1" i="0">
-                <a:solidFill>
-                  <a:srgbClr val="FFD700"/>
-                </a:solidFill>
-                <a:latin typeface="Calibri"/>
+                <a:solidFill>val="F0B429"/&gt;</a:solidFill>
+                <a:latin typeface="Poppins"/>
               </a:rPr>
               <a:t>Le modèle OSI et TCP/IP</a:t>
             </a:r>
@@ -11134,6 +11514,47 @@
           </a:prstGeom>
         </p:spPr>
       </p:pic>
+      <p:sp>
+        <p:nvSpPr>
+          <p:cNvPr id="990001" name="Pied de page FLE"/>
+          <p:cNvSpPr>
+            <a:spLocks noGrp="1"/>
+          </p:cNvSpPr>
+          <p:nvPr/>
+        </p:nvSpPr>
+        <p:spPr>
+          <a:xfrm>
+            <a:off x="4343400" y="-329184"/>
+            <a:ext cx="4572000" cy="274320"/>
+          </a:xfrm>
+          <a:prstGeom prst="rect">
+            <a:avLst/>
+          </a:prstGeom>
+        </p:spPr>
+        <p:txBody>
+          <a:bodyPr anchor="b"/>
+          <a:lstStyle/>
+          <a:p>
+            <a:pPr algn="r">
+              <a:defRPr sz="900">
+                <a:solidFill>
+                  <a:srgbClr val="9AA7B6"/>
+                </a:solidFill>
+                <a:latin typeface="Poppins"/>
+              </a:defRPr>
+            </a:pPr>
+            <a:r>
+              <a:rPr lang="fr-FR" sz="900">
+                <a:solidFill>
+                  <a:srgbClr val="9AA7B6"/>
+                </a:solidFill>
+                <a:latin typeface="Poppins"/>
+              </a:rPr>
+              <a:t>Université de Mostaganem — Dr. Madani BELACEL</a:t>
+            </a:r>
+          </a:p>
+        </p:txBody>
+      </p:sp>
     </p:spTree>
   </p:cSld>
   <p:clrMapOvr>
@@ -11185,7 +11606,7 @@
     </a:clrScheme>
     <a:fontScheme name="Office">
       <a:majorFont>
-        <a:latin typeface="Calibri"/>
+        <a:latin typeface="Poppins"/>
         <a:ea typeface=""/>
         <a:cs typeface=""/>
         <a:font script="Jpan" typeface="ＭＳ Ｐゴシック"/>
@@ -11220,7 +11641,7 @@
         <a:font script="Geor" typeface="Sylfaen"/>
       </a:majorFont>
       <a:minorFont>
-        <a:latin typeface="Calibri"/>
+        <a:latin typeface="Poppins"/>
         <a:ea typeface=""/>
         <a:cs typeface=""/>
         <a:font script="Jpan" typeface="ＭＳ Ｐゴシック"/>
